--- a/section3_part2_internals.pptx
+++ b/section3_part2_internals.pptx
@@ -2124,7 +2124,7 @@
                 <a:ea typeface="Noto Sans CJK KR" pitchFamily="34" charset="-122"/>
                 <a:cs typeface="Noto Sans CJK KR" pitchFamily="34" charset="-120"/>
               </a:rPr>
-              <a:t>별도의 "슬레이브 ID" 식별 시스템은 없음 — 슬롯 위치 번호(0~7)가 식별자 역할을 대신함</a:t>
+              <a:t>하나의 물리 시퀀서가 마스터 사이클마다 8개의 고정 슬롯을 순차 처리 — 슬롯 위치 번호(0~7)가 식별자 역할</a:t>
             </a:r>
             <a:endParaRPr lang="en-US" sz="2000" dirty="0"/>
           </a:p>
@@ -2417,7 +2417,7 @@
                 <a:ea typeface="Noto Sans CJK KR" pitchFamily="34" charset="-122"/>
                 <a:cs typeface="Noto Sans CJK KR" pitchFamily="34" charset="-120"/>
               </a:rPr>
-              <a:t>합성 가능한 실제 RTL로 구현되어 있으며, 테스트벤치 전용 코드가 아님</a:t>
+              <a:t>합성 가능한 RTL로 구현됨</a:t>
             </a:r>
             <a:endParaRPr lang="en-US" sz="2000" dirty="0"/>
           </a:p>
@@ -4627,7 +4627,7 @@
                 <a:ea typeface="Noto Sans CJK KR" pitchFamily="34" charset="-122"/>
                 <a:cs typeface="Noto Sans CJK KR" pitchFamily="34" charset="-120"/>
               </a:rPr>
-              <a:t>"FSM이 진단한다"는 표현과 달리, 실제로는 슬롯별 4개의 임계값 카운터(preamble_err_cnt, slot_timeout_cnt, hamming_err_cnt, silent_cnt)와 조합논리로 동작함</a:t>
+              <a:t>Master는 슬롯별로 4개의 임계값 카운터(preamble_err_cnt, slot_timeout_cnt, hamming_err_cnt, silent_cnt)와 조합논리로 고장을 진단함</a:t>
             </a:r>
             <a:endParaRPr lang="en-US" sz="1600" dirty="0"/>
           </a:p>

--- a/section3_part2_internals.pptx
+++ b/section3_part2_internals.pptx
@@ -13,11 +13,9 @@
     <p:sldId id="261" r:id="rId7"/>
     <p:sldId id="262" r:id="rId8"/>
     <p:sldId id="263" r:id="rId9"/>
-    <p:sldId id="264" r:id="rId10"/>
-    <p:sldId id="265" r:id="rId11"/>
   </p:sldIdLst>
   <p:notesMasterIdLst>
-    <p:notesMasterId r:id="rId12"/>
+    <p:notesMasterId r:id="rId10"/>
   </p:notesMasterIdLst>
   <p:sldSz cx="9144000" cy="5143500"/>
   <p:notesSz cx="5143500" cy="9144000"/>
@@ -553,94 +551,6 @@
 </p:notes>
 </file>
 
-<file path=ppt/notesSlides/notesSlide10.xml><?xml version="1.0" encoding="utf-8"?>
-<p:notes xmlns:a="http://schemas.openxmlformats.org/drawingml/2006/main" xmlns:r="http://schemas.openxmlformats.org/officeDocument/2006/relationships" xmlns:p="http://schemas.openxmlformats.org/presentationml/2006/main">
-  <p:cSld>
-    <p:spTree>
-      <p:nvGrpSpPr>
-        <p:cNvPr id="1" name=""/>
-        <p:cNvGrpSpPr/>
-        <p:nvPr/>
-      </p:nvGrpSpPr>
-      <p:grpSpPr>
-        <a:xfrm>
-          <a:off x="0" y="0"/>
-          <a:ext cx="0" cy="0"/>
-          <a:chOff x="0" y="0"/>
-          <a:chExt cx="0" cy="0"/>
-        </a:xfrm>
-      </p:grpSpPr>
-      <p:sp>
-        <p:nvSpPr>
-          <p:cNvPr id="2" name="Slide Image Placeholder 1"/>
-          <p:cNvSpPr>
-            <a:spLocks noGrp="1" noRot="1" noChangeAspect="1"/>
-          </p:cNvSpPr>
-          <p:nvPr>
-            <p:ph type="sldImg"/>
-          </p:nvPr>
-        </p:nvSpPr>
-        <p:spPr/>
-      </p:sp>
-      <p:sp>
-        <p:nvSpPr>
-          <p:cNvPr id="3" name="Notes Placeholder 2"/>
-          <p:cNvSpPr>
-            <a:spLocks noGrp="1"/>
-          </p:cNvSpPr>
-          <p:nvPr>
-            <p:ph type="body" idx="1"/>
-          </p:nvPr>
-        </p:nvSpPr>
-        <p:spPr/>
-        <p:txBody>
-          <a:bodyPr/>
-          <a:lstStyle/>
-          <a:p>
-            <a:r>
-              <a:rPr lang="en-US" dirty="0"/>
-              <a:t/>
-            </a:r>
-            <a:endParaRPr lang="en-US" dirty="0"/>
-          </a:p>
-        </p:txBody>
-      </p:sp>
-      <p:sp>
-        <p:nvSpPr>
-          <p:cNvPr id="4" name="Slide Number Placeholder 3"/>
-          <p:cNvSpPr>
-            <a:spLocks noGrp="1"/>
-          </p:cNvSpPr>
-          <p:nvPr>
-            <p:ph type="sldNum" sz="quarter" idx="10"/>
-          </p:nvPr>
-        </p:nvSpPr>
-        <p:spPr/>
-        <p:txBody>
-          <a:bodyPr/>
-          <a:lstStyle/>
-          <a:p>
-            <a:fld id="{F7021451-1387-4CA6-816F-3879F97B5CBC}" type="slidenum">
-              <a:rPr lang="en-US"/>
-              <a:t>10</a:t>
-            </a:fld>
-            <a:endParaRPr lang="en-US"/>
-          </a:p>
-        </p:txBody>
-      </p:sp>
-    </p:spTree>
-    <p:extLst>
-      <p:ext uri="{BB962C8B-B14F-4D97-AF65-F5344CB8AC3E}">
-        <p14:creationId xmlns:p14="http://schemas.microsoft.com/office/powerpoint/2010/main" val="1024086991"/>
-      </p:ext>
-    </p:extLst>
-  </p:cSld>
-  <p:clrMapOvr>
-    <a:masterClrMapping/>
-  </p:clrMapOvr>
-</p:notes>
-</file>
-
 <file path=ppt/notesSlides/notesSlide2.xml><?xml version="1.0" encoding="utf-8"?>
 <p:notes xmlns:a="http://schemas.openxmlformats.org/drawingml/2006/main" xmlns:r="http://schemas.openxmlformats.org/officeDocument/2006/relationships" xmlns:p="http://schemas.openxmlformats.org/presentationml/2006/main">
   <p:cSld>
@@ -1239,94 +1149,6 @@
             <a:fld id="{F7021451-1387-4CA6-816F-3879F97B5CBC}" type="slidenum">
               <a:rPr lang="en-US"/>
               <a:t>8</a:t>
-            </a:fld>
-            <a:endParaRPr lang="en-US"/>
-          </a:p>
-        </p:txBody>
-      </p:sp>
-    </p:spTree>
-    <p:extLst>
-      <p:ext uri="{BB962C8B-B14F-4D97-AF65-F5344CB8AC3E}">
-        <p14:creationId xmlns:p14="http://schemas.microsoft.com/office/powerpoint/2010/main" val="1024086991"/>
-      </p:ext>
-    </p:extLst>
-  </p:cSld>
-  <p:clrMapOvr>
-    <a:masterClrMapping/>
-  </p:clrMapOvr>
-</p:notes>
-</file>
-
-<file path=ppt/notesSlides/notesSlide9.xml><?xml version="1.0" encoding="utf-8"?>
-<p:notes xmlns:a="http://schemas.openxmlformats.org/drawingml/2006/main" xmlns:r="http://schemas.openxmlformats.org/officeDocument/2006/relationships" xmlns:p="http://schemas.openxmlformats.org/presentationml/2006/main">
-  <p:cSld>
-    <p:spTree>
-      <p:nvGrpSpPr>
-        <p:cNvPr id="1" name=""/>
-        <p:cNvGrpSpPr/>
-        <p:nvPr/>
-      </p:nvGrpSpPr>
-      <p:grpSpPr>
-        <a:xfrm>
-          <a:off x="0" y="0"/>
-          <a:ext cx="0" cy="0"/>
-          <a:chOff x="0" y="0"/>
-          <a:chExt cx="0" cy="0"/>
-        </a:xfrm>
-      </p:grpSpPr>
-      <p:sp>
-        <p:nvSpPr>
-          <p:cNvPr id="2" name="Slide Image Placeholder 1"/>
-          <p:cNvSpPr>
-            <a:spLocks noGrp="1" noRot="1" noChangeAspect="1"/>
-          </p:cNvSpPr>
-          <p:nvPr>
-            <p:ph type="sldImg"/>
-          </p:nvPr>
-        </p:nvSpPr>
-        <p:spPr/>
-      </p:sp>
-      <p:sp>
-        <p:nvSpPr>
-          <p:cNvPr id="3" name="Notes Placeholder 2"/>
-          <p:cNvSpPr>
-            <a:spLocks noGrp="1"/>
-          </p:cNvSpPr>
-          <p:nvPr>
-            <p:ph type="body" idx="1"/>
-          </p:nvPr>
-        </p:nvSpPr>
-        <p:spPr/>
-        <p:txBody>
-          <a:bodyPr/>
-          <a:lstStyle/>
-          <a:p>
-            <a:r>
-              <a:rPr lang="en-US" dirty="0"/>
-              <a:t/>
-            </a:r>
-            <a:endParaRPr lang="en-US" dirty="0"/>
-          </a:p>
-        </p:txBody>
-      </p:sp>
-      <p:sp>
-        <p:nvSpPr>
-          <p:cNvPr id="4" name="Slide Number Placeholder 3"/>
-          <p:cNvSpPr>
-            <a:spLocks noGrp="1"/>
-          </p:cNvSpPr>
-          <p:nvPr>
-            <p:ph type="sldNum" sz="quarter" idx="10"/>
-          </p:nvPr>
-        </p:nvSpPr>
-        <p:spPr/>
-        <p:txBody>
-          <a:bodyPr/>
-          <a:lstStyle/>
-          <a:p>
-            <a:fld id="{F7021451-1387-4CA6-816F-3879F97B5CBC}" type="slidenum">
-              <a:rPr lang="en-US"/>
-              <a:t>9</a:t>
             </a:fld>
             <a:endParaRPr lang="en-US"/>
           </a:p>
@@ -1801,236 +1623,6 @@
 </p:sld>
 </file>
 
-<file path=ppt/slides/slide10.xml><?xml version="1.0" encoding="utf-8"?>
-<p:sld xmlns:a="http://schemas.openxmlformats.org/drawingml/2006/main" xmlns:r="http://schemas.openxmlformats.org/officeDocument/2006/relationships" xmlns:p="http://schemas.openxmlformats.org/presentationml/2006/main">
-  <p:cSld name="Slide 10">
-    <p:spTree>
-      <p:nvGrpSpPr>
-        <p:cNvPr id="1" name=""/>
-        <p:cNvGrpSpPr/>
-        <p:nvPr/>
-      </p:nvGrpSpPr>
-      <p:grpSpPr>
-        <a:xfrm>
-          <a:off x="0" y="0"/>
-          <a:ext cx="0" cy="0"/>
-          <a:chOff x="0" y="0"/>
-          <a:chExt cx="0" cy="0"/>
-        </a:xfrm>
-      </p:grpSpPr>
-      <p:sp>
-        <p:nvSpPr>
-          <p:cNvPr id="2" name="Text 0"/>
-          <p:cNvSpPr/>
-          <p:nvPr/>
-        </p:nvSpPr>
-        <p:spPr>
-          <a:xfrm>
-            <a:off x="548640" y="274320"/>
-            <a:ext cx="8046720" cy="777240"/>
-          </a:xfrm>
-          <a:prstGeom prst="rect">
-            <a:avLst/>
-          </a:prstGeom>
-          <a:noFill/>
-          <a:ln/>
-        </p:spPr>
-        <p:txBody>
-          <a:bodyPr wrap="square" lIns="0" tIns="0" rIns="0" bIns="0" rtlCol="0" anchor="ctr"/>
-          <a:lstStyle/>
-          <a:p>
-            <a:pPr indent="0" marL="0">
-              <a:buNone/>
-            </a:pPr>
-            <a:r>
-              <a:rPr lang="en-US" sz="3600" b="1" dirty="0">
-                <a:solidFill>
-                  <a:srgbClr val="111111"/>
-                </a:solidFill>
-                <a:latin typeface="Noto Sans CJK KR" pitchFamily="34" charset="0"/>
-                <a:ea typeface="Noto Sans CJK KR" pitchFamily="34" charset="-122"/>
-                <a:cs typeface="Noto Sans CJK KR" pitchFamily="34" charset="-120"/>
-              </a:rPr>
-              <a:t>Slave 측 처리와 모델 차이</a:t>
-            </a:r>
-            <a:endParaRPr lang="en-US" sz="3600" dirty="0"/>
-          </a:p>
-        </p:txBody>
-      </p:sp>
-      <p:sp>
-        <p:nvSpPr>
-          <p:cNvPr id="3" name="Text 1"/>
-          <p:cNvSpPr/>
-          <p:nvPr/>
-        </p:nvSpPr>
-        <p:spPr>
-          <a:xfrm>
-            <a:off x="548640" y="1234440"/>
-            <a:ext cx="8046720" cy="2971800"/>
-          </a:xfrm>
-          <a:prstGeom prst="rect">
-            <a:avLst/>
-          </a:prstGeom>
-          <a:noFill/>
-          <a:ln/>
-        </p:spPr>
-        <p:txBody>
-          <a:bodyPr wrap="square" rtlCol="0" anchor="t"/>
-          <a:lstStyle/>
-          <a:p>
-            <a:pPr marL="342900" indent="-342900">
-              <a:spcAft>
-                <a:spcPts val="1200"/>
-              </a:spcAft>
-              <a:buSzPct val="100000"/>
-              <a:buChar char="•"/>
-            </a:pPr>
-            <a:r>
-              <a:rPr lang="en-US" sz="2000" dirty="0">
-                <a:solidFill>
-                  <a:srgbClr val="222222"/>
-                </a:solidFill>
-                <a:latin typeface="Noto Sans CJK KR" pitchFamily="34" charset="0"/>
-                <a:ea typeface="Noto Sans CJK KR" pitchFamily="34" charset="-122"/>
-                <a:cs typeface="Noto Sans CJK KR" pitchFamily="34" charset="-120"/>
-              </a:rPr>
-              <a:t>halt_cmd 수신 시 해당 슬롯을 active_slot에서 제외 — 그 슬롯의 TX 자체가 발행되지 않음</a:t>
-            </a:r>
-            <a:endParaRPr lang="en-US" sz="2000" dirty="0"/>
-          </a:p>
-          <a:p>
-            <a:pPr marL="342900" indent="-342900">
-              <a:spcAft>
-                <a:spcPts val="1200"/>
-              </a:spcAft>
-              <a:buSzPct val="100000"/>
-              <a:buChar char="•"/>
-            </a:pPr>
-            <a:r>
-              <a:rPr lang="en-US" sz="2000" dirty="0">
-                <a:solidFill>
-                  <a:srgbClr val="222222"/>
-                </a:solidFill>
-                <a:latin typeface="Noto Sans CJK KR" pitchFamily="34" charset="0"/>
-                <a:ea typeface="Noto Sans CJK KR" pitchFamily="34" charset="-122"/>
-                <a:cs typeface="Noto Sans CJK KR" pitchFamily="34" charset="-120"/>
-              </a:rPr>
-              <a:t>자체 감지 고장: tx_overlap, slot_timing_invalid, pl_payload6/7_invalid, rx_ham_2bit</a:t>
-            </a:r>
-            <a:endParaRPr lang="en-US" sz="2000" dirty="0"/>
-          </a:p>
-          <a:p>
-            <a:pPr lvl="1" marL="685800" indent="-342900">
-              <a:spcAft>
-                <a:spcPts val="800"/>
-              </a:spcAft>
-              <a:buSzPct val="100000"/>
-              <a:buChar char="•"/>
-            </a:pPr>
-            <a:r>
-              <a:rPr lang="en-US" sz="1700" dirty="0">
-                <a:solidFill>
-                  <a:srgbClr val="444444"/>
-                </a:solidFill>
-                <a:latin typeface="Noto Sans CJK KR" pitchFamily="34" charset="0"/>
-                <a:ea typeface="Noto Sans CJK KR" pitchFamily="34" charset="-122"/>
-                <a:cs typeface="Noto Sans CJK KR" pitchFamily="34" charset="-120"/>
-              </a:rPr>
-              <a:t>처리: sticky W1C 플래그 설정 + PS에 인터럽트(o_irq) — PS가 직접 클리어해야 함</a:t>
-            </a:r>
-            <a:endParaRPr lang="en-US" sz="2000" dirty="0"/>
-          </a:p>
-          <a:p>
-            <a:pPr lvl="1" marL="685800" indent="-342900">
-              <a:spcAft>
-                <a:spcPts val="800"/>
-              </a:spcAft>
-              <a:buSzPct val="100000"/>
-              <a:buChar char="•"/>
-            </a:pPr>
-            <a:r>
-              <a:rPr lang="en-US" sz="1700" dirty="0">
-                <a:solidFill>
-                  <a:srgbClr val="444444"/>
-                </a:solidFill>
-                <a:latin typeface="Noto Sans CJK KR" pitchFamily="34" charset="0"/>
-                <a:ea typeface="Noto Sans CJK KR" pitchFamily="34" charset="-122"/>
-                <a:cs typeface="Noto Sans CJK KR" pitchFamily="34" charset="-120"/>
-              </a:rPr>
-              <a:t>자체 감지 고장은 보고만 하고 자동 셧다운하지 않음 — 능동적 송신 중단은 halt_cmd 수신 시뿐</a:t>
-            </a:r>
-            <a:endParaRPr lang="en-US" sz="2000" dirty="0"/>
-          </a:p>
-          <a:p>
-            <a:pPr marL="342900" indent="-342900">
-              <a:spcAft>
-                <a:spcPts val="1200"/>
-              </a:spcAft>
-              <a:buSzPct val="100000"/>
-              <a:buChar char="•"/>
-            </a:pPr>
-            <a:r>
-              <a:rPr lang="en-US" sz="2000" dirty="0">
-                <a:solidFill>
-                  <a:srgbClr val="222222"/>
-                </a:solidFill>
-                <a:latin typeface="Noto Sans CJK KR" pitchFamily="34" charset="0"/>
-                <a:ea typeface="Noto Sans CJK KR" pitchFamily="34" charset="-122"/>
-                <a:cs typeface="Noto Sans CJK KR" pitchFamily="34" charset="-120"/>
-              </a:rPr>
-              <a:t>Master(누적-임계치 err_cnt/FAULT_TH 모델) ↔ Slave(상태없는 sticky 이벤트 플래그 모델) — 공유되는 건 halt_cmd/broadcast_halt_mask 8비트뿐</a:t>
-            </a:r>
-            <a:endParaRPr lang="en-US" sz="2000" dirty="0"/>
-          </a:p>
-        </p:txBody>
-      </p:sp>
-      <p:sp>
-        <p:nvSpPr>
-          <p:cNvPr id="4" name="Text 2"/>
-          <p:cNvSpPr/>
-          <p:nvPr/>
-        </p:nvSpPr>
-        <p:spPr>
-          <a:xfrm>
-            <a:off x="8503920" y="4754880"/>
-            <a:ext cx="457200" cy="274320"/>
-          </a:xfrm>
-          <a:prstGeom prst="rect">
-            <a:avLst/>
-          </a:prstGeom>
-          <a:noFill/>
-          <a:ln/>
-        </p:spPr>
-        <p:txBody>
-          <a:bodyPr wrap="square" rtlCol="0" anchor="ctr"/>
-          <a:lstStyle/>
-          <a:p>
-            <a:pPr algn="r" indent="0" marL="0">
-              <a:buNone/>
-            </a:pPr>
-            <a:r>
-              <a:rPr lang="en-US" sz="1200" dirty="0">
-                <a:solidFill>
-                  <a:srgbClr val="999999"/>
-                </a:solidFill>
-                <a:latin typeface="Noto Sans CJK KR" pitchFamily="34" charset="0"/>
-                <a:ea typeface="Noto Sans CJK KR" pitchFamily="34" charset="-122"/>
-                <a:cs typeface="Noto Sans CJK KR" pitchFamily="34" charset="-120"/>
-              </a:rPr>
-              <a:t>10</a:t>
-            </a:r>
-            <a:endParaRPr lang="en-US" sz="1200" dirty="0"/>
-          </a:p>
-        </p:txBody>
-      </p:sp>
-    </p:spTree>
-  </p:cSld>
-  <p:clrMapOvr>
-    <a:masterClrMapping/>
-  </p:clrMapOvr>
-</p:sld>
-</file>
-
 <file path=ppt/slides/slide2.xml><?xml version="1.0" encoding="utf-8"?>
 <p:sld xmlns:a="http://schemas.openxmlformats.org/drawingml/2006/main" xmlns:r="http://schemas.openxmlformats.org/officeDocument/2006/relationships" xmlns:p="http://schemas.openxmlformats.org/presentationml/2006/main">
   <p:cSld name="Slide 2">
@@ -2081,7 +1673,7 @@
                 <a:ea typeface="Noto Sans CJK KR" pitchFamily="34" charset="-122"/>
                 <a:cs typeface="Noto Sans CJK KR" pitchFamily="34" charset="-120"/>
               </a:rPr>
-              <a:t>멀티 슬롯 시뮬레이션 구조</a:t>
+              <a:t>Slave의 멀티 슬롯 시뮬레이션</a:t>
             </a:r>
             <a:endParaRPr lang="en-US" sz="3600" dirty="0"/>
           </a:p>
@@ -2124,7 +1716,7 @@
                 <a:ea typeface="Noto Sans CJK KR" pitchFamily="34" charset="-122"/>
                 <a:cs typeface="Noto Sans CJK KR" pitchFamily="34" charset="-120"/>
               </a:rPr>
-              <a:t>하나의 물리 시퀀서가 마스터 사이클마다 8개의 고정 슬롯을 순차 처리 — 슬롯 위치 번호(0~7)가 식별자 역할</a:t>
+              <a:t>통신 시연에서는 하나의 물리 시퀀서가 8개의 슬롯(슬롯 인덱스 0~7)을 순차 처리 — 슬롯 위치가 식별자 역할을 함</a:t>
             </a:r>
             <a:endParaRPr lang="en-US" sz="2000" dirty="0"/>
           </a:p>
@@ -2145,7 +1737,7 @@
                 <a:ea typeface="Noto Sans CJK KR" pitchFamily="34" charset="-122"/>
                 <a:cs typeface="Noto Sans CJK KR" pitchFamily="34" charset="-120"/>
               </a:rPr>
-              <a:t>i_CFG_ACTIVE_SLOT[7:0] 비트마스크로 슬롯별 활성/비활성 결정</a:t>
+              <a:t>각 슬롯은 자신의 타임슬롯에서 자신의 payload를 전송 (슬롯별 절대 타겟 틱을 기준으로 순회)</a:t>
             </a:r>
             <a:endParaRPr lang="en-US" sz="2000" dirty="0"/>
           </a:p>
@@ -2166,28 +1758,7 @@
                 <a:ea typeface="Noto Sans CJK KR" pitchFamily="34" charset="-122"/>
                 <a:cs typeface="Noto Sans CJK KR" pitchFamily="34" charset="-120"/>
               </a:rPr>
-              <a:t>슬롯별 payload 출처가 분리됨</a:t>
-            </a:r>
-            <a:endParaRPr lang="en-US" sz="2000" dirty="0"/>
-          </a:p>
-          <a:p>
-            <a:pPr lvl="1" marL="685800" indent="-342900">
-              <a:spcAft>
-                <a:spcPts val="800"/>
-              </a:spcAft>
-              <a:buSzPct val="100000"/>
-              <a:buChar char="•"/>
-            </a:pPr>
-            <a:r>
-              <a:rPr lang="en-US" sz="1700" dirty="0">
-                <a:solidFill>
-                  <a:srgbClr val="444444"/>
-                </a:solidFill>
-                <a:latin typeface="Noto Sans CJK KR" pitchFamily="34" charset="0"/>
-                <a:ea typeface="Noto Sans CJK KR" pitchFamily="34" charset="-122"/>
-                <a:cs typeface="Noto Sans CJK KR" pitchFamily="34" charset="-120"/>
-              </a:rPr>
-              <a:t>슬롯 0~5: AXI 레지스터, 슬롯 6~7: 외부 PL 버스</a:t>
+              <a:t>슬롯 0~5는 AXI 레지스터, 슬롯 6~7은 외부 PL 버스에서 payload를 가져옴</a:t>
             </a:r>
             <a:endParaRPr lang="en-US" sz="2000" dirty="0"/>
           </a:p>
@@ -2208,7 +1779,7 @@
                 <a:ea typeface="Noto Sans CJK KR" pitchFamily="34" charset="-122"/>
                 <a:cs typeface="Noto Sans CJK KR" pitchFamily="34" charset="-120"/>
               </a:rPr>
-              <a:t>슬롯 인덱스가 프레임에 {slot_id, payload} 형태로 직접 포함됨</a:t>
+              <a:t>시연에서는 버튼으로 payload 값을 바꾸고, 변경된 값이 Master에서 정확히 수신되는지 확인</a:t>
             </a:r>
             <a:endParaRPr lang="en-US" sz="2000" dirty="0"/>
           </a:p>
@@ -2311,216 +1882,7 @@
                 <a:ea typeface="Noto Sans CJK KR" pitchFamily="34" charset="-122"/>
                 <a:cs typeface="Noto Sans CJK KR" pitchFamily="34" charset="-120"/>
               </a:rPr>
-              <a:t>슬롯 순회 타이밍과 한계</a:t>
-            </a:r>
-            <a:endParaRPr lang="en-US" sz="3600" dirty="0"/>
-          </a:p>
-        </p:txBody>
-      </p:sp>
-      <p:sp>
-        <p:nvSpPr>
-          <p:cNvPr id="3" name="Text 1"/>
-          <p:cNvSpPr/>
-          <p:nvPr/>
-        </p:nvSpPr>
-        <p:spPr>
-          <a:xfrm>
-            <a:off x="548640" y="1234440"/>
-            <a:ext cx="8046720" cy="2971800"/>
-          </a:xfrm>
-          <a:prstGeom prst="rect">
-            <a:avLst/>
-          </a:prstGeom>
-          <a:noFill/>
-          <a:ln/>
-        </p:spPr>
-        <p:txBody>
-          <a:bodyPr wrap="square" rtlCol="0" anchor="t"/>
-          <a:lstStyle/>
-          <a:p>
-            <a:pPr marL="342900" indent="-342900">
-              <a:spcAft>
-                <a:spcPts val="1200"/>
-              </a:spcAft>
-              <a:buSzPct val="100000"/>
-              <a:buChar char="•"/>
-            </a:pPr>
-            <a:r>
-              <a:rPr lang="en-US" sz="2000" dirty="0">
-                <a:solidFill>
-                  <a:srgbClr val="222222"/>
-                </a:solidFill>
-                <a:latin typeface="Noto Sans CJK KR" pitchFamily="34" charset="0"/>
-                <a:ea typeface="Noto Sans CJK KR" pitchFamily="34" charset="-122"/>
-                <a:cs typeface="Noto Sans CJK KR" pitchFamily="34" charset="-120"/>
-              </a:rPr>
-              <a:t>sync_pulse를 기준으로 8개 슬롯의 절대 타겟 틱을 계산 (slave_timing_scheduler)</a:t>
-            </a:r>
-            <a:endParaRPr lang="en-US" sz="2000" dirty="0"/>
-          </a:p>
-          <a:p>
-            <a:pPr marL="342900" indent="-342900">
-              <a:spcAft>
-                <a:spcPts val="1200"/>
-              </a:spcAft>
-              <a:buSzPct val="100000"/>
-              <a:buChar char="•"/>
-            </a:pPr>
-            <a:r>
-              <a:rPr lang="en-US" sz="2000" dirty="0">
-                <a:solidFill>
-                  <a:srgbClr val="222222"/>
-                </a:solidFill>
-                <a:latin typeface="Noto Sans CJK KR" pitchFamily="34" charset="0"/>
-                <a:ea typeface="Noto Sans CJK KR" pitchFamily="34" charset="-122"/>
-                <a:cs typeface="Noto Sans CJK KR" pitchFamily="34" charset="-120"/>
-              </a:rPr>
-              <a:t>시퀀서 FSM이 슬롯 0→7 순서로 순회하며, 각 슬롯의 타겟 시각에 도달하면 TX 발행</a:t>
-            </a:r>
-            <a:endParaRPr lang="en-US" sz="2000" dirty="0"/>
-          </a:p>
-          <a:p>
-            <a:pPr marL="342900" indent="-342900">
-              <a:spcAft>
-                <a:spcPts val="1200"/>
-              </a:spcAft>
-              <a:buSzPct val="100000"/>
-              <a:buChar char="•"/>
-            </a:pPr>
-            <a:r>
-              <a:rPr lang="en-US" sz="2000" dirty="0">
-                <a:solidFill>
-                  <a:srgbClr val="222222"/>
-                </a:solidFill>
-                <a:latin typeface="Noto Sans CJK KR" pitchFamily="34" charset="0"/>
-                <a:ea typeface="Noto Sans CJK KR" pitchFamily="34" charset="-122"/>
-                <a:cs typeface="Noto Sans CJK KR" pitchFamily="34" charset="-120"/>
-              </a:rPr>
-              <a:t>3비트 slot_id 필드 폭의 구조적 한계로 최대 8개로 고정 — 파라미터로 늘릴 수 없음</a:t>
-            </a:r>
-            <a:endParaRPr lang="en-US" sz="2000" dirty="0"/>
-          </a:p>
-          <a:p>
-            <a:pPr marL="342900" indent="-342900">
-              <a:spcAft>
-                <a:spcPts val="1200"/>
-              </a:spcAft>
-              <a:buSzPct val="100000"/>
-              <a:buChar char="•"/>
-            </a:pPr>
-            <a:r>
-              <a:rPr lang="en-US" sz="2000" dirty="0">
-                <a:solidFill>
-                  <a:srgbClr val="222222"/>
-                </a:solidFill>
-                <a:latin typeface="Noto Sans CJK KR" pitchFamily="34" charset="0"/>
-                <a:ea typeface="Noto Sans CJK KR" pitchFamily="34" charset="-122"/>
-                <a:cs typeface="Noto Sans CJK KR" pitchFamily="34" charset="-120"/>
-              </a:rPr>
-              <a:t>합성 가능한 RTL로 구현됨</a:t>
-            </a:r>
-            <a:endParaRPr lang="en-US" sz="2000" dirty="0"/>
-          </a:p>
-        </p:txBody>
-      </p:sp>
-      <p:sp>
-        <p:nvSpPr>
-          <p:cNvPr id="4" name="Text 2"/>
-          <p:cNvSpPr/>
-          <p:nvPr/>
-        </p:nvSpPr>
-        <p:spPr>
-          <a:xfrm>
-            <a:off x="8503920" y="4754880"/>
-            <a:ext cx="457200" cy="274320"/>
-          </a:xfrm>
-          <a:prstGeom prst="rect">
-            <a:avLst/>
-          </a:prstGeom>
-          <a:noFill/>
-          <a:ln/>
-        </p:spPr>
-        <p:txBody>
-          <a:bodyPr wrap="square" rtlCol="0" anchor="ctr"/>
-          <a:lstStyle/>
-          <a:p>
-            <a:pPr algn="r" indent="0" marL="0">
-              <a:buNone/>
-            </a:pPr>
-            <a:r>
-              <a:rPr lang="en-US" sz="1200" dirty="0">
-                <a:solidFill>
-                  <a:srgbClr val="999999"/>
-                </a:solidFill>
-                <a:latin typeface="Noto Sans CJK KR" pitchFamily="34" charset="0"/>
-                <a:ea typeface="Noto Sans CJK KR" pitchFamily="34" charset="-122"/>
-                <a:cs typeface="Noto Sans CJK KR" pitchFamily="34" charset="-120"/>
-              </a:rPr>
-              <a:t>3</a:t>
-            </a:r>
-            <a:endParaRPr lang="en-US" sz="1200" dirty="0"/>
-          </a:p>
-        </p:txBody>
-      </p:sp>
-    </p:spTree>
-  </p:cSld>
-  <p:clrMapOvr>
-    <a:masterClrMapping/>
-  </p:clrMapOvr>
-</p:sld>
-</file>
-
-<file path=ppt/slides/slide4.xml><?xml version="1.0" encoding="utf-8"?>
-<p:sld xmlns:a="http://schemas.openxmlformats.org/drawingml/2006/main" xmlns:r="http://schemas.openxmlformats.org/officeDocument/2006/relationships" xmlns:p="http://schemas.openxmlformats.org/presentationml/2006/main">
-  <p:cSld name="Slide 4">
-    <p:spTree>
-      <p:nvGrpSpPr>
-        <p:cNvPr id="1" name=""/>
-        <p:cNvGrpSpPr/>
-        <p:nvPr/>
-      </p:nvGrpSpPr>
-      <p:grpSpPr>
-        <a:xfrm>
-          <a:off x="0" y="0"/>
-          <a:ext cx="0" cy="0"/>
-          <a:chOff x="0" y="0"/>
-          <a:chExt cx="0" cy="0"/>
-        </a:xfrm>
-      </p:grpSpPr>
-      <p:sp>
-        <p:nvSpPr>
-          <p:cNvPr id="2" name="Text 0"/>
-          <p:cNvSpPr/>
-          <p:nvPr/>
-        </p:nvSpPr>
-        <p:spPr>
-          <a:xfrm>
-            <a:off x="548640" y="274320"/>
-            <a:ext cx="8046720" cy="777240"/>
-          </a:xfrm>
-          <a:prstGeom prst="rect">
-            <a:avLst/>
-          </a:prstGeom>
-          <a:noFill/>
-          <a:ln/>
-        </p:spPr>
-        <p:txBody>
-          <a:bodyPr wrap="square" lIns="0" tIns="0" rIns="0" bIns="0" rtlCol="0" anchor="ctr"/>
-          <a:lstStyle/>
-          <a:p>
-            <a:pPr indent="0" marL="0">
-              <a:buNone/>
-            </a:pPr>
-            <a:r>
-              <a:rPr lang="en-US" sz="3600" b="1" dirty="0">
-                <a:solidFill>
-                  <a:srgbClr val="111111"/>
-                </a:solidFill>
-                <a:latin typeface="Noto Sans CJK KR" pitchFamily="34" charset="0"/>
-                <a:ea typeface="Noto Sans CJK KR" pitchFamily="34" charset="-122"/>
-                <a:cs typeface="Noto Sans CJK KR" pitchFamily="34" charset="-120"/>
-              </a:rPr>
-              <a:t>버튼 기반 Payload 생성</a:t>
+              <a:t>Slave의 payload</a:t>
             </a:r>
             <a:endParaRPr lang="en-US" sz="3600" dirty="0"/>
           </a:p>
@@ -2563,7 +1925,7 @@
                 <a:ea typeface="Noto Sans CJK KR" pitchFamily="34" charset="-122"/>
                 <a:cs typeface="Noto Sans CJK KR" pitchFamily="34" charset="-120"/>
               </a:rPr>
-              <a:t>버튼을 20ms 주기로 샘플링, HIGH→LOW 디바운스 펄스를 검출했을 때만 1회 증가</a:t>
+              <a:t>payload 레지스터는 리셋 시 0으로 초기화</a:t>
             </a:r>
             <a:endParaRPr lang="en-US" sz="1800" dirty="0"/>
           </a:p>
@@ -2581,7 +1943,7 @@
                 <a:ea typeface="Noto Sans CJK KR" pitchFamily="34" charset="-122"/>
                 <a:cs typeface="Noto Sans CJK KR" pitchFamily="34" charset="-120"/>
               </a:rPr>
-              <a:t>슬롯별 증가량은 정확히 2^slot_id — 8개의 독립된 32비트 레지스터</a:t>
+              <a:t>버튼의 디바운스된 단발 펄스마다 슬롯별로 정해진 값만큼 증가</a:t>
             </a:r>
             <a:endParaRPr lang="en-US" sz="1800" dirty="0"/>
           </a:p>
@@ -2589,7 +1951,7 @@
       </p:sp>
       <p:graphicFrame>
         <p:nvGraphicFramePr>
-          <p:cNvPr id="5" name="Table 0"/>
+          <p:cNvPr id="4" name="Table 0"/>
           <p:cNvGraphicFramePr>
             <a:graphicFrameLocks noGrp="1"/>
           </p:cNvGraphicFramePr>
@@ -3897,6 +3259,215 @@
                 <a:ea typeface="Noto Sans CJK KR" pitchFamily="34" charset="-122"/>
                 <a:cs typeface="Noto Sans CJK KR" pitchFamily="34" charset="-120"/>
               </a:rPr>
+              <a:t>3</a:t>
+            </a:r>
+            <a:endParaRPr lang="en-US" sz="1200" dirty="0"/>
+          </a:p>
+        </p:txBody>
+      </p:sp>
+    </p:spTree>
+  </p:cSld>
+  <p:clrMapOvr>
+    <a:masterClrMapping/>
+  </p:clrMapOvr>
+</p:sld>
+</file>
+
+<file path=ppt/slides/slide4.xml><?xml version="1.0" encoding="utf-8"?>
+<p:sld xmlns:a="http://schemas.openxmlformats.org/drawingml/2006/main" xmlns:r="http://schemas.openxmlformats.org/officeDocument/2006/relationships" xmlns:p="http://schemas.openxmlformats.org/presentationml/2006/main">
+  <p:cSld name="Slide 4">
+    <p:spTree>
+      <p:nvGrpSpPr>
+        <p:cNvPr id="1" name=""/>
+        <p:cNvGrpSpPr/>
+        <p:nvPr/>
+      </p:nvGrpSpPr>
+      <p:grpSpPr>
+        <a:xfrm>
+          <a:off x="0" y="0"/>
+          <a:ext cx="0" cy="0"/>
+          <a:chOff x="0" y="0"/>
+          <a:chExt cx="0" cy="0"/>
+        </a:xfrm>
+      </p:grpSpPr>
+      <p:sp>
+        <p:nvSpPr>
+          <p:cNvPr id="2" name="Text 0"/>
+          <p:cNvSpPr/>
+          <p:nvPr/>
+        </p:nvSpPr>
+        <p:spPr>
+          <a:xfrm>
+            <a:off x="548640" y="274320"/>
+            <a:ext cx="8046720" cy="777240"/>
+          </a:xfrm>
+          <a:prstGeom prst="rect">
+            <a:avLst/>
+          </a:prstGeom>
+          <a:noFill/>
+          <a:ln/>
+        </p:spPr>
+        <p:txBody>
+          <a:bodyPr wrap="square" lIns="0" tIns="0" rIns="0" bIns="0" rtlCol="0" anchor="ctr"/>
+          <a:lstStyle/>
+          <a:p>
+            <a:pPr indent="0" marL="0">
+              <a:buNone/>
+            </a:pPr>
+            <a:r>
+              <a:rPr lang="en-US" sz="3600" b="1" dirty="0">
+                <a:solidFill>
+                  <a:srgbClr val="111111"/>
+                </a:solidFill>
+                <a:latin typeface="Noto Sans CJK KR" pitchFamily="34" charset="0"/>
+                <a:ea typeface="Noto Sans CJK KR" pitchFamily="34" charset="-122"/>
+                <a:cs typeface="Noto Sans CJK KR" pitchFamily="34" charset="-120"/>
+              </a:rPr>
+              <a:t>클럭 동기의 어려움</a:t>
+            </a:r>
+            <a:endParaRPr lang="en-US" sz="3600" dirty="0"/>
+          </a:p>
+        </p:txBody>
+      </p:sp>
+      <p:sp>
+        <p:nvSpPr>
+          <p:cNvPr id="3" name="Text 1"/>
+          <p:cNvSpPr/>
+          <p:nvPr/>
+        </p:nvSpPr>
+        <p:spPr>
+          <a:xfrm>
+            <a:off x="548640" y="1234440"/>
+            <a:ext cx="8046720" cy="2971800"/>
+          </a:xfrm>
+          <a:prstGeom prst="rect">
+            <a:avLst/>
+          </a:prstGeom>
+          <a:noFill/>
+          <a:ln/>
+        </p:spPr>
+        <p:txBody>
+          <a:bodyPr wrap="square" rtlCol="0" anchor="t"/>
+          <a:lstStyle/>
+          <a:p>
+            <a:pPr marL="342900" indent="-342900">
+              <a:spcAft>
+                <a:spcPts val="1200"/>
+              </a:spcAft>
+              <a:buSzPct val="100000"/>
+              <a:buChar char="•"/>
+            </a:pPr>
+            <a:r>
+              <a:rPr lang="en-US" sz="2000" dirty="0">
+                <a:solidFill>
+                  <a:srgbClr val="222222"/>
+                </a:solidFill>
+                <a:latin typeface="Noto Sans CJK KR" pitchFamily="34" charset="0"/>
+                <a:ea typeface="Noto Sans CJK KR" pitchFamily="34" charset="-122"/>
+                <a:cs typeface="Noto Sans CJK KR" pitchFamily="34" charset="-120"/>
+              </a:rPr>
+              <a:t>Master·Slave는 클럭을 공유하지 않음 — 클럭 오차가 통신에 치명적인 방해 요인</a:t>
+            </a:r>
+            <a:endParaRPr lang="en-US" sz="2000" dirty="0"/>
+          </a:p>
+          <a:p>
+            <a:pPr marL="342900" indent="-342900">
+              <a:spcAft>
+                <a:spcPts val="1200"/>
+              </a:spcAft>
+              <a:buSzPct val="100000"/>
+              <a:buChar char="•"/>
+            </a:pPr>
+            <a:r>
+              <a:rPr lang="en-US" sz="2000" dirty="0">
+                <a:solidFill>
+                  <a:srgbClr val="222222"/>
+                </a:solidFill>
+                <a:latin typeface="Noto Sans CJK KR" pitchFamily="34" charset="0"/>
+                <a:ea typeface="Noto Sans CJK KR" pitchFamily="34" charset="-122"/>
+                <a:cs typeface="Noto Sans CJK KR" pitchFamily="34" charset="-120"/>
+              </a:rPr>
+              <a:t>DIV 값을 AXI 레지스터로 설정해 클럭을 분주, Master·Slave 양쪽에 동일한 DIV 값을 쓴다고 가정</a:t>
+            </a:r>
+            <a:endParaRPr lang="en-US" sz="2000" dirty="0"/>
+          </a:p>
+          <a:p>
+            <a:pPr marL="342900" indent="-342900">
+              <a:spcAft>
+                <a:spcPts val="1200"/>
+              </a:spcAft>
+              <a:buSzPct val="100000"/>
+              <a:buChar char="•"/>
+            </a:pPr>
+            <a:r>
+              <a:rPr lang="en-US" sz="2000" dirty="0">
+                <a:solidFill>
+                  <a:srgbClr val="222222"/>
+                </a:solidFill>
+                <a:latin typeface="Noto Sans CJK KR" pitchFamily="34" charset="0"/>
+                <a:ea typeface="Noto Sans CJK KR" pitchFamily="34" charset="-122"/>
+                <a:cs typeface="Noto Sans CJK KR" pitchFamily="34" charset="-120"/>
+              </a:rPr>
+              <a:t>분주된 비트 구간은 Master가 DIV 클럭, Slave가 (DIV+1) 클럭으로 1클럭만큼 비대칭 — 동일 DIV를 가정해도 실제 주파수는 정확히 같지 않음</a:t>
+            </a:r>
+            <a:endParaRPr lang="en-US" sz="2000" dirty="0"/>
+          </a:p>
+          <a:p>
+            <a:pPr marL="342900" indent="-342900">
+              <a:spcAft>
+                <a:spcPts val="1200"/>
+              </a:spcAft>
+              <a:buSzPct val="100000"/>
+              <a:buChar char="•"/>
+            </a:pPr>
+            <a:r>
+              <a:rPr lang="en-US" sz="2000" dirty="0">
+                <a:solidFill>
+                  <a:srgbClr val="222222"/>
+                </a:solidFill>
+                <a:latin typeface="Noto Sans CJK KR" pitchFamily="34" charset="0"/>
+                <a:ea typeface="Noto Sans CJK KR" pitchFamily="34" charset="-122"/>
+                <a:cs typeface="Noto Sans CJK KR" pitchFamily="34" charset="-120"/>
+              </a:rPr>
+              <a:t>수신 샘플링은 비트 구간의 중간 지점에서 1회만 수행</a:t>
+            </a:r>
+            <a:endParaRPr lang="en-US" sz="2000" dirty="0"/>
+          </a:p>
+        </p:txBody>
+      </p:sp>
+      <p:sp>
+        <p:nvSpPr>
+          <p:cNvPr id="4" name="Text 2"/>
+          <p:cNvSpPr/>
+          <p:nvPr/>
+        </p:nvSpPr>
+        <p:spPr>
+          <a:xfrm>
+            <a:off x="8503920" y="4754880"/>
+            <a:ext cx="457200" cy="274320"/>
+          </a:xfrm>
+          <a:prstGeom prst="rect">
+            <a:avLst/>
+          </a:prstGeom>
+          <a:noFill/>
+          <a:ln/>
+        </p:spPr>
+        <p:txBody>
+          <a:bodyPr wrap="square" rtlCol="0" anchor="ctr"/>
+          <a:lstStyle/>
+          <a:p>
+            <a:pPr algn="r" indent="0" marL="0">
+              <a:buNone/>
+            </a:pPr>
+            <a:r>
+              <a:rPr lang="en-US" sz="1200" dirty="0">
+                <a:solidFill>
+                  <a:srgbClr val="999999"/>
+                </a:solidFill>
+                <a:latin typeface="Noto Sans CJK KR" pitchFamily="34" charset="0"/>
+                <a:ea typeface="Noto Sans CJK KR" pitchFamily="34" charset="-122"/>
+                <a:cs typeface="Noto Sans CJK KR" pitchFamily="34" charset="-120"/>
+              </a:rPr>
               <a:t>4</a:t>
             </a:r>
             <a:endParaRPr lang="en-US" sz="1200" dirty="0"/>
@@ -3961,7 +3532,7 @@
                 <a:ea typeface="Noto Sans CJK KR" pitchFamily="34" charset="-122"/>
                 <a:cs typeface="Noto Sans CJK KR" pitchFamily="34" charset="-120"/>
               </a:rPr>
-              <a:t>Master 수신 및 검증</a:t>
+              <a:t>Master의 고장 처리</a:t>
             </a:r>
             <a:endParaRPr lang="en-US" sz="3600" dirty="0"/>
           </a:p>
@@ -4004,7 +3575,7 @@
                 <a:ea typeface="Noto Sans CJK KR" pitchFamily="34" charset="-122"/>
                 <a:cs typeface="Noto Sans CJK KR" pitchFamily="34" charset="-120"/>
               </a:rPr>
-              <a:t>디코딩된 payload가 슬롯별로 slot_out0~7 레지스터에 저장됨</a:t>
+              <a:t>슬롯별 4가지 카운터(preamble_err_cnt, slot_timeout_cnt, hamming_err_cnt, silent_cnt)로 임계치 기반 고장 판정</a:t>
             </a:r>
             <a:endParaRPr lang="en-US" sz="2000" dirty="0"/>
           </a:p>
@@ -4025,7 +3596,7 @@
                 <a:ea typeface="Noto Sans CJK KR" pitchFamily="34" charset="-122"/>
                 <a:cs typeface="Noto Sans CJK KR" pitchFamily="34" charset="-120"/>
               </a:rPr>
-              <a:t>DIP 스위치로 원하는 슬롯을 선택해 7-세그먼트에 표시</a:t>
+              <a:t>slot_timeout_cnt는 심각한 타이밍/주소 불일치 시 즉시 255로 saturate, 약한 가드 경계 오류 시 +6</a:t>
             </a:r>
             <a:endParaRPr lang="en-US" sz="2000" dirty="0"/>
           </a:p>
@@ -4046,28 +3617,28 @@
                 <a:ea typeface="Noto Sans CJK KR" pitchFamily="34" charset="-122"/>
                 <a:cs typeface="Noto Sans CJK KR" pitchFamily="34" charset="-120"/>
               </a:rPr>
-              <a:t>테스트벤치(tb_btn_payload_ctrl.v, tb_btn_slave_master_comm.v)로 검증</a:t>
+              <a:t>판정 임곗값(FAULT_TH, SILENT_TH)은 PS가 AXI 레지스터로 설정</a:t>
             </a:r>
             <a:endParaRPr lang="en-US" sz="2000" dirty="0"/>
           </a:p>
           <a:p>
-            <a:pPr lvl="1" marL="685800" indent="-342900">
+            <a:pPr marL="342900" indent="-342900">
               <a:spcAft>
-                <a:spcPts val="800"/>
+                <a:spcPts val="1200"/>
               </a:spcAft>
               <a:buSzPct val="100000"/>
               <a:buChar char="•"/>
             </a:pPr>
             <a:r>
-              <a:rPr lang="en-US" sz="1700" dirty="0">
+              <a:rPr lang="en-US" sz="2000" dirty="0">
                 <a:solidFill>
-                  <a:srgbClr val="444444"/>
+                  <a:srgbClr val="222222"/>
                 </a:solidFill>
                 <a:latin typeface="Noto Sans CJK KR" pitchFamily="34" charset="0"/>
                 <a:ea typeface="Noto Sans CJK KR" pitchFamily="34" charset="-122"/>
                 <a:cs typeface="Noto Sans CJK KR" pitchFamily="34" charset="-120"/>
               </a:rPr>
-              <a:t>버튼→슬레이브→마스터 전체 경로에서 n_press × {1,2,4,...,128}이 정확히 일치함을 확인</a:t>
+              <a:t>(preamble_err_cnt + slot_timeout_cnt + hamming_err_cnt) &gt; FAULT_TH 이면 halt_cmd=1 → 동기 프레임에 실어 전송 (silent_cnt는 표시용으로 합산에서 제외)</a:t>
             </a:r>
             <a:endParaRPr lang="en-US" sz="2000" dirty="0"/>
           </a:p>
@@ -4170,7 +3741,7 @@
                 <a:ea typeface="Noto Sans CJK KR" pitchFamily="34" charset="-122"/>
                 <a:cs typeface="Noto Sans CJK KR" pitchFamily="34" charset="-120"/>
               </a:rPr>
-              <a:t>클럭 분리와 분주비</a:t>
+              <a:t>Master 고장 처리 흐름도</a:t>
             </a:r>
             <a:endParaRPr lang="en-US" sz="3600" dirty="0"/>
           </a:p>
@@ -4185,7 +3756,7 @@
         <p:spPr>
           <a:xfrm>
             <a:off x="548640" y="1234440"/>
-            <a:ext cx="8046720" cy="2971800"/>
+            <a:ext cx="3383280" cy="2971800"/>
           </a:xfrm>
           <a:prstGeom prst="rect">
             <a:avLst/>
@@ -4199,13 +3770,13 @@
           <a:p>
             <a:pPr marL="342900" indent="-342900">
               <a:spcAft>
-                <a:spcPts val="1200"/>
+                <a:spcPts val="800"/>
               </a:spcAft>
               <a:buSzPct val="100000"/>
               <a:buChar char="•"/>
             </a:pPr>
             <a:r>
-              <a:rPr lang="en-US" sz="2000" dirty="0">
+              <a:rPr lang="en-US" sz="1600" dirty="0">
                 <a:solidFill>
                   <a:srgbClr val="222222"/>
                 </a:solidFill>
@@ -4213,20 +3784,20 @@
                 <a:ea typeface="Noto Sans CJK KR" pitchFamily="34" charset="-122"/>
                 <a:cs typeface="Noto Sans CJK KR" pitchFamily="34" charset="-120"/>
               </a:rPr>
-              <a:t>Master·Slave는 클럭선을 공유하지 않음 — 데이터선(TX/RX 1비트)만 연결, 각자 로컬 클럭에서 분주</a:t>
-            </a:r>
-            <a:endParaRPr lang="en-US" sz="2000" dirty="0"/>
+              <a:t>슬롯마다 프리앰블 → 타이밍 → Hamming 순으로 검사</a:t>
+            </a:r>
+            <a:endParaRPr lang="en-US" sz="1600" dirty="0"/>
           </a:p>
           <a:p>
             <a:pPr marL="342900" indent="-342900">
               <a:spcAft>
-                <a:spcPts val="1200"/>
+                <a:spcPts val="800"/>
               </a:spcAft>
               <a:buSzPct val="100000"/>
               <a:buChar char="•"/>
             </a:pPr>
             <a:r>
-              <a:rPr lang="en-US" sz="2000" dirty="0">
+              <a:rPr lang="en-US" sz="1600" dirty="0">
                 <a:solidFill>
                   <a:srgbClr val="222222"/>
                 </a:solidFill>
@@ -4234,20 +3805,20 @@
                 <a:ea typeface="Noto Sans CJK KR" pitchFamily="34" charset="-122"/>
                 <a:cs typeface="Noto Sans CJK KR" pitchFamily="34" charset="-120"/>
               </a:rPr>
-              <a:t>분주비 DIV는 AXI 레지스터로 런타임에 소프트웨어가 설정 (하드코딩된 기본값 없음)</a:t>
-            </a:r>
-            <a:endParaRPr lang="en-US" sz="2000" dirty="0"/>
+              <a:t>각 단계의 오류는 해당 카운터를 증가시킴</a:t>
+            </a:r>
+            <a:endParaRPr lang="en-US" sz="1600" dirty="0"/>
           </a:p>
           <a:p>
             <a:pPr marL="342900" indent="-342900">
               <a:spcAft>
-                <a:spcPts val="1200"/>
+                <a:spcPts val="800"/>
               </a:spcAft>
               <a:buSzPct val="100000"/>
               <a:buChar char="•"/>
             </a:pPr>
             <a:r>
-              <a:rPr lang="en-US" sz="2000" dirty="0">
+              <a:rPr lang="en-US" sz="1600" dirty="0">
                 <a:solidFill>
                   <a:srgbClr val="222222"/>
                 </a:solidFill>
@@ -4255,20 +3826,20 @@
                 <a:ea typeface="Noto Sans CJK KR" pitchFamily="34" charset="-122"/>
                 <a:cs typeface="Noto Sans CJK KR" pitchFamily="34" charset="-120"/>
               </a:rPr>
-              <a:t>Master·Slave 양쪽에 동일한 DIV 값으로 설정한다고 가정</a:t>
-            </a:r>
-            <a:endParaRPr lang="en-US" sz="2000" dirty="0"/>
+              <a:t>누적합이 FAULT_TH를 넘으면 halt_cmd=1, 이후 카운터는 동결됨</a:t>
+            </a:r>
+            <a:endParaRPr lang="en-US" sz="1600" dirty="0"/>
           </a:p>
           <a:p>
             <a:pPr marL="342900" indent="-342900">
               <a:spcAft>
-                <a:spcPts val="1200"/>
+                <a:spcPts val="800"/>
               </a:spcAft>
               <a:buSzPct val="100000"/>
               <a:buChar char="•"/>
             </a:pPr>
             <a:r>
-              <a:rPr lang="en-US" sz="2000" dirty="0">
+              <a:rPr lang="en-US" sz="1600" dirty="0">
                 <a:solidFill>
                   <a:srgbClr val="222222"/>
                 </a:solidFill>
@@ -4276,15 +3847,38 @@
                 <a:ea typeface="Noto Sans CJK KR" pitchFamily="34" charset="-122"/>
                 <a:cs typeface="Noto Sans CJK KR" pitchFamily="34" charset="-120"/>
               </a:rPr>
-              <a:t>1비트 구간 = DIV + 1 클럭</a:t>
-            </a:r>
-            <a:endParaRPr lang="en-US" sz="2000" dirty="0"/>
+              <a:t>halt_cmd는 리셋 전까지 유지되며, 취소 경로는 없음</a:t>
+            </a:r>
+            <a:endParaRPr lang="en-US" sz="1600" dirty="0"/>
           </a:p>
         </p:txBody>
       </p:sp>
-      <p:sp>
-        <p:nvSpPr>
-          <p:cNvPr id="4" name="Text 2"/>
+      <p:pic>
+        <p:nvPicPr>
+          <p:cNvPr id="4" name="Image 0" descr="/home/user/SoC_Design_and_Programming/diagrams/section3/zoom/master_fault_flow.png">    </p:cNvPr>
+          <p:cNvPicPr>
+            <a:picLocks noChangeAspect="1"/>
+          </p:cNvPicPr>
+          <p:nvPr/>
+        </p:nvPicPr>
+        <p:blipFill>
+          <a:blip r:embed="rId1"/>
+          <a:srcRect l="0" r="0" t="0" b="0"/>
+          <a:stretch/>
+        </p:blipFill>
+        <p:spPr>
+          <a:xfrm>
+            <a:off x="5843658" y="1097280"/>
+            <a:ext cx="1205725" cy="3200400"/>
+          </a:xfrm>
+          <a:prstGeom prst="rect">
+            <a:avLst/>
+          </a:prstGeom>
+        </p:spPr>
+      </p:pic>
+      <p:sp>
+        <p:nvSpPr>
+          <p:cNvPr id="5" name="Text 2"/>
           <p:cNvSpPr/>
           <p:nvPr/>
         </p:nvSpPr>
@@ -4379,7 +3973,7 @@
                 <a:ea typeface="Noto Sans CJK KR" pitchFamily="34" charset="-122"/>
                 <a:cs typeface="Noto Sans CJK KR" pitchFamily="34" charset="-120"/>
               </a:rPr>
-              <a:t>비트 샘플링과 한계</a:t>
+              <a:t>Slave의 고장 처리</a:t>
             </a:r>
             <a:endParaRPr lang="en-US" sz="3600" dirty="0"/>
           </a:p>
@@ -4422,7 +4016,7 @@
                 <a:ea typeface="Noto Sans CJK KR" pitchFamily="34" charset="-122"/>
                 <a:cs typeface="Noto Sans CJK KR" pitchFamily="34" charset="-120"/>
               </a:rPr>
-              <a:t>매 비트 구간의 중간 지점에서 정확히 1회만 샘플링 — 오버샘플링·다수결 방식이 아님</a:t>
+              <a:t>Master broadcast 프레임의 halt_cmd(halt_mask) 필드를 수신하면 해당 슬롯을 active_slot에서 제외 → 그 슬롯의 TX가 발행되지 않음</a:t>
             </a:r>
             <a:endParaRPr lang="en-US" sz="2000" dirty="0"/>
           </a:p>
@@ -4443,7 +4037,7 @@
                 <a:ea typeface="Noto Sans CJK KR" pitchFamily="34" charset="-122"/>
                 <a:cs typeface="Noto Sans CJK KR" pitchFamily="34" charset="-120"/>
               </a:rPr>
-              <a:t>에지 검출은 프레임 시작(프리앰블)에만 사용되어 동기를 재정렬</a:t>
+              <a:t>Master가 다음 broadcast에서 해당 비트를 0으로 보내면 다음 사이클부터 자동으로 재개 — Slave 쪽에서 재시작을 요청하는 로직은 없음</a:t>
             </a:r>
             <a:endParaRPr lang="en-US" sz="2000" dirty="0"/>
           </a:p>
@@ -4464,28 +4058,7 @@
                 <a:ea typeface="Noto Sans CJK KR" pitchFamily="34" charset="-122"/>
                 <a:cs typeface="Noto Sans CJK KR" pitchFamily="34" charset="-120"/>
               </a:rPr>
-              <a:t>이후 비트들은 순수 카운터 기반으로 진행 — 비트마다 재동기하지 않음</a:t>
-            </a:r>
-            <a:endParaRPr lang="en-US" sz="2000" dirty="0"/>
-          </a:p>
-          <a:p>
-            <a:pPr marL="342900" indent="-342900">
-              <a:spcAft>
-                <a:spcPts val="1200"/>
-              </a:spcAft>
-              <a:buSzPct val="100000"/>
-              <a:buChar char="•"/>
-            </a:pPr>
-            <a:r>
-              <a:rPr lang="en-US" sz="2000" dirty="0">
-                <a:solidFill>
-                  <a:srgbClr val="222222"/>
-                </a:solidFill>
-                <a:latin typeface="Noto Sans CJK KR" pitchFamily="34" charset="0"/>
-                <a:ea typeface="Noto Sans CJK KR" pitchFamily="34" charset="-122"/>
-                <a:cs typeface="Noto Sans CJK KR" pitchFamily="34" charset="-120"/>
-              </a:rPr>
-              <a:t>한계: guard_ticks는 슬롯 경계 여유 파라미터일 뿐, 비트 단위 클럭 드리프트 허용치를 정량화·보장하는 코드는 없음</a:t>
+              <a:t>Slave 자체 감지 고장(tx_overlap, slot_timing_invalid, pl_payload6/7_invalid, rx_ham_2bit)은 sticky 플래그로 누적되어 PS에 인터럽트만 발생, 자동 셧다운은 하지 않음</a:t>
             </a:r>
             <a:endParaRPr lang="en-US" sz="2000" dirty="0"/>
           </a:p>
@@ -4588,7 +4161,7 @@
                 <a:ea typeface="Noto Sans CJK KR" pitchFamily="34" charset="-122"/>
                 <a:cs typeface="Noto Sans CJK KR" pitchFamily="34" charset="-120"/>
               </a:rPr>
-              <a:t>Master의 고장 진단과 처리</a:t>
+              <a:t>Slave halt 흐름도</a:t>
             </a:r>
             <a:endParaRPr lang="en-US" sz="3600" dirty="0"/>
           </a:p>
@@ -4602,8 +4175,8 @@
         </p:nvSpPr>
         <p:spPr>
           <a:xfrm>
-            <a:off x="548640" y="1188720"/>
-            <a:ext cx="8046720" cy="502920"/>
+            <a:off x="548640" y="1234440"/>
+            <a:ext cx="3383280" cy="2971800"/>
           </a:xfrm>
           <a:prstGeom prst="rect">
             <a:avLst/>
@@ -4615,984 +4188,114 @@
           <a:bodyPr wrap="square" rtlCol="0" anchor="t"/>
           <a:lstStyle/>
           <a:p>
-            <a:pPr indent="0" marL="0">
-              <a:buNone/>
+            <a:pPr marL="342900" indent="-342900">
+              <a:spcAft>
+                <a:spcPts val="800"/>
+              </a:spcAft>
+              <a:buSzPct val="100000"/>
+              <a:buChar char="•"/>
             </a:pPr>
             <a:r>
               <a:rPr lang="en-US" sz="1600" dirty="0">
                 <a:solidFill>
-                  <a:srgbClr val="444444"/>
+                  <a:srgbClr val="222222"/>
                 </a:solidFill>
                 <a:latin typeface="Noto Sans CJK KR" pitchFamily="34" charset="0"/>
                 <a:ea typeface="Noto Sans CJK KR" pitchFamily="34" charset="-122"/>
                 <a:cs typeface="Noto Sans CJK KR" pitchFamily="34" charset="-120"/>
               </a:rPr>
-              <a:t>Master는 슬롯별로 4개의 임계값 카운터(preamble_err_cnt, slot_timeout_cnt, hamming_err_cnt, silent_cnt)와 조합논리로 고장을 진단함</a:t>
+              <a:t>Master broadcast에서 halt_mask 추출</a:t>
             </a:r>
             <a:endParaRPr lang="en-US" sz="1600" dirty="0"/>
           </a:p>
+          <a:p>
+            <a:pPr marL="342900" indent="-342900">
+              <a:spcAft>
+                <a:spcPts val="800"/>
+              </a:spcAft>
+              <a:buSzPct val="100000"/>
+              <a:buChar char="•"/>
+            </a:pPr>
+            <a:r>
+              <a:rPr lang="en-US" sz="1600" dirty="0">
+                <a:solidFill>
+                  <a:srgbClr val="222222"/>
+                </a:solidFill>
+                <a:latin typeface="Noto Sans CJK KR" pitchFamily="34" charset="0"/>
+                <a:ea typeface="Noto Sans CJK KR" pitchFamily="34" charset="-122"/>
+                <a:cs typeface="Noto Sans CJK KR" pitchFamily="34" charset="-120"/>
+              </a:rPr>
+              <a:t>슬롯 시퀀서가 active_slot에서 halt된 슬롯을 제외</a:t>
+            </a:r>
+            <a:endParaRPr lang="en-US" sz="1600" dirty="0"/>
+          </a:p>
+          <a:p>
+            <a:pPr marL="342900" indent="-342900">
+              <a:spcAft>
+                <a:spcPts val="800"/>
+              </a:spcAft>
+              <a:buSzPct val="100000"/>
+              <a:buChar char="•"/>
+            </a:pPr>
+            <a:r>
+              <a:rPr lang="en-US" sz="1600" dirty="0">
+                <a:solidFill>
+                  <a:srgbClr val="222222"/>
+                </a:solidFill>
+                <a:latin typeface="Noto Sans CJK KR" pitchFamily="34" charset="0"/>
+                <a:ea typeface="Noto Sans CJK KR" pitchFamily="34" charset="-122"/>
+                <a:cs typeface="Noto Sans CJK KR" pitchFamily="34" charset="-120"/>
+              </a:rPr>
+              <a:t>해당 슬롯은 TX를 발행하지 않음</a:t>
+            </a:r>
+            <a:endParaRPr lang="en-US" sz="1600" dirty="0"/>
+          </a:p>
+          <a:p>
+            <a:pPr marL="342900" indent="-342900">
+              <a:spcAft>
+                <a:spcPts val="800"/>
+              </a:spcAft>
+              <a:buSzPct val="100000"/>
+              <a:buChar char="•"/>
+            </a:pPr>
+            <a:r>
+              <a:rPr lang="en-US" sz="1600" dirty="0">
+                <a:solidFill>
+                  <a:srgbClr val="222222"/>
+                </a:solidFill>
+                <a:latin typeface="Noto Sans CJK KR" pitchFamily="34" charset="0"/>
+                <a:ea typeface="Noto Sans CJK KR" pitchFamily="34" charset="-122"/>
+                <a:cs typeface="Noto Sans CJK KR" pitchFamily="34" charset="-120"/>
+              </a:rPr>
+              <a:t>Master가 비트를 다시 0으로 보내면 자동 재개</a:t>
+            </a:r>
+            <a:endParaRPr lang="en-US" sz="1600" dirty="0"/>
+          </a:p>
         </p:txBody>
       </p:sp>
-      <p:graphicFrame>
-        <p:nvGraphicFramePr>
-          <p:cNvPr id="9" name="Table 0"/>
-          <p:cNvGraphicFramePr>
-            <a:graphicFrameLocks noGrp="1"/>
-          </p:cNvGraphicFramePr>
-          <p:nvPr>
-            <p:extLst>
-              <p:ext uri="{D42A27DB-BD31-4B8C-83A1-F6EECF244321}">
-                <p14:modId xmlns:p14="http://schemas.microsoft.com/office/powerpoint/2010/main" val="1579011935"/>
-              </p:ext>
-            </p:extLst>
-          </p:nvPr>
-        </p:nvGraphicFramePr>
-        <p:xfrm>
-          <a:off x="548640" y="1783080"/>
-          <a:ext cx="8046720" cy="914400"/>
-        </p:xfrm>
-        <a:graphic>
-          <a:graphicData uri="http://schemas.openxmlformats.org/drawingml/2006/table">
-            <a:tbl>
-              <a:tblPr/>
-              <a:tblGrid>
-                <a:gridCol w="4023360"/>
-                <a:gridCol w="4023360"/>
-              </a:tblGrid>
-              <a:tr h="329184">
-                <a:tc>
-                  <a:txBody>
-                    <a:bodyPr/>
-                    <a:lstStyle/>
-                    <a:p>
-                      <a:pPr indent="0" marL="0">
-                        <a:buNone/>
-                      </a:pPr>
-                      <a:r>
-                        <a:rPr lang="en-US" sz="1400" b="1" dirty="0">
-                          <a:solidFill>
-                            <a:srgbClr val="FFFFFF"/>
-                          </a:solidFill>
-                          <a:latin typeface="Noto Sans CJK KR" pitchFamily="34" charset="0"/>
-                          <a:ea typeface="Noto Sans CJK KR" pitchFamily="34" charset="-122"/>
-                          <a:cs typeface="Noto Sans CJK KR" pitchFamily="34" charset="-120"/>
-                        </a:rPr>
-                        <a:t>고장 유형</a:t>
-                      </a:r>
-                      <a:endParaRPr lang="en-US" sz="1400" dirty="0">
-                        <a:latin typeface="Noto Sans CJK KR" charset="0"/>
-                        <a:ea typeface="Noto Sans CJK KR" charset="0"/>
-                        <a:cs typeface="Noto Sans CJK KR" charset="0"/>
-                      </a:endParaRPr>
-                    </a:p>
-                  </a:txBody>
-                  <a:tcPr marL="91440" marR="91440" marT="45720" marB="45720">
-                    <a:lnL w="6350" cap="flat" cmpd="sng" algn="ctr">
-                      <a:solidFill>
-                        <a:srgbClr val="CCCCCC"/>
-                      </a:solidFill>
-                      <a:prstDash val="solid"/>
-                      <a:round/>
-                      <a:headEnd type="none" w="med" len="med"/>
-                      <a:tailEnd type="none" w="med" len="med"/>
-                    </a:lnL>
-                    <a:lnR w="6350" cap="flat" cmpd="sng" algn="ctr">
-                      <a:solidFill>
-                        <a:srgbClr val="CCCCCC"/>
-                      </a:solidFill>
-                      <a:prstDash val="solid"/>
-                      <a:round/>
-                      <a:headEnd type="none" w="med" len="med"/>
-                      <a:tailEnd type="none" w="med" len="med"/>
-                    </a:lnR>
-                    <a:lnT w="6350" cap="flat" cmpd="sng" algn="ctr">
-                      <a:solidFill>
-                        <a:srgbClr val="CCCCCC"/>
-                      </a:solidFill>
-                      <a:prstDash val="solid"/>
-                      <a:round/>
-                      <a:headEnd type="none" w="med" len="med"/>
-                      <a:tailEnd type="none" w="med" len="med"/>
-                    </a:lnT>
-                    <a:lnB w="6350" cap="flat" cmpd="sng" algn="ctr">
-                      <a:solidFill>
-                        <a:srgbClr val="CCCCCC"/>
-                      </a:solidFill>
-                      <a:prstDash val="solid"/>
-                      <a:round/>
-                      <a:headEnd type="none" w="med" len="med"/>
-                      <a:tailEnd type="none" w="med" len="med"/>
-                    </a:lnB>
-                    <a:solidFill>
-                      <a:srgbClr val="2D2D2D"/>
-                    </a:solidFill>
-                  </a:tcPr>
-                </a:tc>
-                <a:tc>
-                  <a:txBody>
-                    <a:bodyPr/>
-                    <a:lstStyle/>
-                    <a:p>
-                      <a:pPr indent="0" marL="0">
-                        <a:buNone/>
-                      </a:pPr>
-                      <a:r>
-                        <a:rPr lang="en-US" sz="1400" b="1" dirty="0">
-                          <a:solidFill>
-                            <a:srgbClr val="FFFFFF"/>
-                          </a:solidFill>
-                          <a:latin typeface="Noto Sans CJK KR" pitchFamily="34" charset="0"/>
-                          <a:ea typeface="Noto Sans CJK KR" pitchFamily="34" charset="-122"/>
-                          <a:cs typeface="Noto Sans CJK KR" pitchFamily="34" charset="-120"/>
-                        </a:rPr>
-                        <a:t>처리</a:t>
-                      </a:r>
-                      <a:endParaRPr lang="en-US" sz="1400" dirty="0">
-                        <a:latin typeface="Noto Sans CJK KR" charset="0"/>
-                        <a:ea typeface="Noto Sans CJK KR" charset="0"/>
-                        <a:cs typeface="Noto Sans CJK KR" charset="0"/>
-                      </a:endParaRPr>
-                    </a:p>
-                  </a:txBody>
-                  <a:tcPr marL="91440" marR="91440" marT="45720" marB="45720">
-                    <a:lnL w="6350" cap="flat" cmpd="sng" algn="ctr">
-                      <a:solidFill>
-                        <a:srgbClr val="CCCCCC"/>
-                      </a:solidFill>
-                      <a:prstDash val="solid"/>
-                      <a:round/>
-                      <a:headEnd type="none" w="med" len="med"/>
-                      <a:tailEnd type="none" w="med" len="med"/>
-                    </a:lnL>
-                    <a:lnR w="6350" cap="flat" cmpd="sng" algn="ctr">
-                      <a:solidFill>
-                        <a:srgbClr val="CCCCCC"/>
-                      </a:solidFill>
-                      <a:prstDash val="solid"/>
-                      <a:round/>
-                      <a:headEnd type="none" w="med" len="med"/>
-                      <a:tailEnd type="none" w="med" len="med"/>
-                    </a:lnR>
-                    <a:lnT w="6350" cap="flat" cmpd="sng" algn="ctr">
-                      <a:solidFill>
-                        <a:srgbClr val="CCCCCC"/>
-                      </a:solidFill>
-                      <a:prstDash val="solid"/>
-                      <a:round/>
-                      <a:headEnd type="none" w="med" len="med"/>
-                      <a:tailEnd type="none" w="med" len="med"/>
-                    </a:lnT>
-                    <a:lnB w="6350" cap="flat" cmpd="sng" algn="ctr">
-                      <a:solidFill>
-                        <a:srgbClr val="CCCCCC"/>
-                      </a:solidFill>
-                      <a:prstDash val="solid"/>
-                      <a:round/>
-                      <a:headEnd type="none" w="med" len="med"/>
-                      <a:tailEnd type="none" w="med" len="med"/>
-                    </a:lnB>
-                    <a:solidFill>
-                      <a:srgbClr val="2D2D2D"/>
-                    </a:solidFill>
-                  </a:tcPr>
-                </a:tc>
-              </a:tr>
-              <a:tr h="329184">
-                <a:tc>
-                  <a:txBody>
-                    <a:bodyPr/>
-                    <a:lstStyle/>
-                    <a:p>
-                      <a:pPr indent="0" marL="0">
-                        <a:buNone/>
-                      </a:pPr>
-                      <a:r>
-                        <a:rPr lang="en-US" sz="1300" dirty="0">
-                          <a:solidFill>
-                            <a:srgbClr val="222222"/>
-                          </a:solidFill>
-                          <a:latin typeface="Noto Sans CJK KR" pitchFamily="34" charset="0"/>
-                          <a:ea typeface="Noto Sans CJK KR" pitchFamily="34" charset="-122"/>
-                          <a:cs typeface="Noto Sans CJK KR" pitchFamily="34" charset="-120"/>
-                        </a:rPr>
-                        <a:t>프리앰블 불일치</a:t>
-                      </a:r>
-                      <a:endParaRPr lang="en-US" sz="1300" dirty="0">
-                        <a:latin typeface="Noto Sans CJK KR" charset="0"/>
-                        <a:ea typeface="Noto Sans CJK KR" charset="0"/>
-                        <a:cs typeface="Noto Sans CJK KR" charset="0"/>
-                      </a:endParaRPr>
-                    </a:p>
-                  </a:txBody>
-                  <a:tcPr marL="91440" marR="91440" marT="45720" marB="45720">
-                    <a:lnL w="6350" cap="flat" cmpd="sng" algn="ctr">
-                      <a:solidFill>
-                        <a:srgbClr val="CCCCCC"/>
-                      </a:solidFill>
-                      <a:prstDash val="solid"/>
-                      <a:round/>
-                      <a:headEnd type="none" w="med" len="med"/>
-                      <a:tailEnd type="none" w="med" len="med"/>
-                    </a:lnL>
-                    <a:lnR w="6350" cap="flat" cmpd="sng" algn="ctr">
-                      <a:solidFill>
-                        <a:srgbClr val="CCCCCC"/>
-                      </a:solidFill>
-                      <a:prstDash val="solid"/>
-                      <a:round/>
-                      <a:headEnd type="none" w="med" len="med"/>
-                      <a:tailEnd type="none" w="med" len="med"/>
-                    </a:lnR>
-                    <a:lnT w="6350" cap="flat" cmpd="sng" algn="ctr">
-                      <a:solidFill>
-                        <a:srgbClr val="CCCCCC"/>
-                      </a:solidFill>
-                      <a:prstDash val="solid"/>
-                      <a:round/>
-                      <a:headEnd type="none" w="med" len="med"/>
-                      <a:tailEnd type="none" w="med" len="med"/>
-                    </a:lnT>
-                    <a:lnB w="6350" cap="flat" cmpd="sng" algn="ctr">
-                      <a:solidFill>
-                        <a:srgbClr val="CCCCCC"/>
-                      </a:solidFill>
-                      <a:prstDash val="solid"/>
-                      <a:round/>
-                      <a:headEnd type="none" w="med" len="med"/>
-                      <a:tailEnd type="none" w="med" len="med"/>
-                    </a:lnB>
-                  </a:tcPr>
-                </a:tc>
-                <a:tc>
-                  <a:txBody>
-                    <a:bodyPr/>
-                    <a:lstStyle/>
-                    <a:p>
-                      <a:pPr indent="0" marL="0">
-                        <a:buNone/>
-                      </a:pPr>
-                      <a:r>
-                        <a:rPr lang="en-US" sz="1300" dirty="0">
-                          <a:solidFill>
-                            <a:srgbClr val="222222"/>
-                          </a:solidFill>
-                          <a:latin typeface="Noto Sans CJK KR" pitchFamily="34" charset="0"/>
-                          <a:ea typeface="Noto Sans CJK KR" pitchFamily="34" charset="-122"/>
-                          <a:cs typeface="Noto Sans CJK KR" pitchFamily="34" charset="-120"/>
-                        </a:rPr>
-                        <a:t>preamble_err_cnt +6</a:t>
-                      </a:r>
-                      <a:endParaRPr lang="en-US" sz="1300" dirty="0">
-                        <a:latin typeface="Noto Sans CJK KR" charset="0"/>
-                        <a:ea typeface="Noto Sans CJK KR" charset="0"/>
-                        <a:cs typeface="Noto Sans CJK KR" charset="0"/>
-                      </a:endParaRPr>
-                    </a:p>
-                  </a:txBody>
-                  <a:tcPr marL="91440" marR="91440" marT="45720" marB="45720">
-                    <a:lnL w="6350" cap="flat" cmpd="sng" algn="ctr">
-                      <a:solidFill>
-                        <a:srgbClr val="CCCCCC"/>
-                      </a:solidFill>
-                      <a:prstDash val="solid"/>
-                      <a:round/>
-                      <a:headEnd type="none" w="med" len="med"/>
-                      <a:tailEnd type="none" w="med" len="med"/>
-                    </a:lnL>
-                    <a:lnR w="6350" cap="flat" cmpd="sng" algn="ctr">
-                      <a:solidFill>
-                        <a:srgbClr val="CCCCCC"/>
-                      </a:solidFill>
-                      <a:prstDash val="solid"/>
-                      <a:round/>
-                      <a:headEnd type="none" w="med" len="med"/>
-                      <a:tailEnd type="none" w="med" len="med"/>
-                    </a:lnR>
-                    <a:lnT w="6350" cap="flat" cmpd="sng" algn="ctr">
-                      <a:solidFill>
-                        <a:srgbClr val="CCCCCC"/>
-                      </a:solidFill>
-                      <a:prstDash val="solid"/>
-                      <a:round/>
-                      <a:headEnd type="none" w="med" len="med"/>
-                      <a:tailEnd type="none" w="med" len="med"/>
-                    </a:lnT>
-                    <a:lnB w="6350" cap="flat" cmpd="sng" algn="ctr">
-                      <a:solidFill>
-                        <a:srgbClr val="CCCCCC"/>
-                      </a:solidFill>
-                      <a:prstDash val="solid"/>
-                      <a:round/>
-                      <a:headEnd type="none" w="med" len="med"/>
-                      <a:tailEnd type="none" w="med" len="med"/>
-                    </a:lnB>
-                  </a:tcPr>
-                </a:tc>
-              </a:tr>
-              <a:tr h="329184">
-                <a:tc>
-                  <a:txBody>
-                    <a:bodyPr/>
-                    <a:lstStyle/>
-                    <a:p>
-                      <a:pPr indent="0" marL="0">
-                        <a:buNone/>
-                      </a:pPr>
-                      <a:r>
-                        <a:rPr lang="en-US" sz="1300" dirty="0">
-                          <a:solidFill>
-                            <a:srgbClr val="222222"/>
-                          </a:solidFill>
-                          <a:latin typeface="Noto Sans CJK KR" pitchFamily="34" charset="0"/>
-                          <a:ea typeface="Noto Sans CJK KR" pitchFamily="34" charset="-122"/>
-                          <a:cs typeface="Noto Sans CJK KR" pitchFamily="34" charset="-120"/>
-                        </a:rPr>
-                        <a:t>심각한 타이밍 오류 (데이터 윈도우 중 수신/슬롯 불일치)</a:t>
-                      </a:r>
-                      <a:endParaRPr lang="en-US" sz="1300" dirty="0">
-                        <a:latin typeface="Noto Sans CJK KR" charset="0"/>
-                        <a:ea typeface="Noto Sans CJK KR" charset="0"/>
-                        <a:cs typeface="Noto Sans CJK KR" charset="0"/>
-                      </a:endParaRPr>
-                    </a:p>
-                  </a:txBody>
-                  <a:tcPr marL="91440" marR="91440" marT="45720" marB="45720">
-                    <a:lnL w="6350" cap="flat" cmpd="sng" algn="ctr">
-                      <a:solidFill>
-                        <a:srgbClr val="CCCCCC"/>
-                      </a:solidFill>
-                      <a:prstDash val="solid"/>
-                      <a:round/>
-                      <a:headEnd type="none" w="med" len="med"/>
-                      <a:tailEnd type="none" w="med" len="med"/>
-                    </a:lnL>
-                    <a:lnR w="6350" cap="flat" cmpd="sng" algn="ctr">
-                      <a:solidFill>
-                        <a:srgbClr val="CCCCCC"/>
-                      </a:solidFill>
-                      <a:prstDash val="solid"/>
-                      <a:round/>
-                      <a:headEnd type="none" w="med" len="med"/>
-                      <a:tailEnd type="none" w="med" len="med"/>
-                    </a:lnR>
-                    <a:lnT w="6350" cap="flat" cmpd="sng" algn="ctr">
-                      <a:solidFill>
-                        <a:srgbClr val="CCCCCC"/>
-                      </a:solidFill>
-                      <a:prstDash val="solid"/>
-                      <a:round/>
-                      <a:headEnd type="none" w="med" len="med"/>
-                      <a:tailEnd type="none" w="med" len="med"/>
-                    </a:lnT>
-                    <a:lnB w="6350" cap="flat" cmpd="sng" algn="ctr">
-                      <a:solidFill>
-                        <a:srgbClr val="CCCCCC"/>
-                      </a:solidFill>
-                      <a:prstDash val="solid"/>
-                      <a:round/>
-                      <a:headEnd type="none" w="med" len="med"/>
-                      <a:tailEnd type="none" w="med" len="med"/>
-                    </a:lnB>
-                  </a:tcPr>
-                </a:tc>
-                <a:tc>
-                  <a:txBody>
-                    <a:bodyPr/>
-                    <a:lstStyle/>
-                    <a:p>
-                      <a:pPr indent="0" marL="0">
-                        <a:buNone/>
-                      </a:pPr>
-                      <a:r>
-                        <a:rPr lang="en-US" sz="1300" dirty="0">
-                          <a:solidFill>
-                            <a:srgbClr val="222222"/>
-                          </a:solidFill>
-                          <a:latin typeface="Noto Sans CJK KR" pitchFamily="34" charset="0"/>
-                          <a:ea typeface="Noto Sans CJK KR" pitchFamily="34" charset="-122"/>
-                          <a:cs typeface="Noto Sans CJK KR" pitchFamily="34" charset="-120"/>
-                        </a:rPr>
-                        <a:t>slot_timeout_cnt 즉시 255로 saturate</a:t>
-                      </a:r>
-                      <a:endParaRPr lang="en-US" sz="1300" dirty="0">
-                        <a:latin typeface="Noto Sans CJK KR" charset="0"/>
-                        <a:ea typeface="Noto Sans CJK KR" charset="0"/>
-                        <a:cs typeface="Noto Sans CJK KR" charset="0"/>
-                      </a:endParaRPr>
-                    </a:p>
-                  </a:txBody>
-                  <a:tcPr marL="91440" marR="91440" marT="45720" marB="45720">
-                    <a:lnL w="6350" cap="flat" cmpd="sng" algn="ctr">
-                      <a:solidFill>
-                        <a:srgbClr val="CCCCCC"/>
-                      </a:solidFill>
-                      <a:prstDash val="solid"/>
-                      <a:round/>
-                      <a:headEnd type="none" w="med" len="med"/>
-                      <a:tailEnd type="none" w="med" len="med"/>
-                    </a:lnL>
-                    <a:lnR w="6350" cap="flat" cmpd="sng" algn="ctr">
-                      <a:solidFill>
-                        <a:srgbClr val="CCCCCC"/>
-                      </a:solidFill>
-                      <a:prstDash val="solid"/>
-                      <a:round/>
-                      <a:headEnd type="none" w="med" len="med"/>
-                      <a:tailEnd type="none" w="med" len="med"/>
-                    </a:lnR>
-                    <a:lnT w="6350" cap="flat" cmpd="sng" algn="ctr">
-                      <a:solidFill>
-                        <a:srgbClr val="CCCCCC"/>
-                      </a:solidFill>
-                      <a:prstDash val="solid"/>
-                      <a:round/>
-                      <a:headEnd type="none" w="med" len="med"/>
-                      <a:tailEnd type="none" w="med" len="med"/>
-                    </a:lnT>
-                    <a:lnB w="6350" cap="flat" cmpd="sng" algn="ctr">
-                      <a:solidFill>
-                        <a:srgbClr val="CCCCCC"/>
-                      </a:solidFill>
-                      <a:prstDash val="solid"/>
-                      <a:round/>
-                      <a:headEnd type="none" w="med" len="med"/>
-                      <a:tailEnd type="none" w="med" len="med"/>
-                    </a:lnB>
-                  </a:tcPr>
-                </a:tc>
-              </a:tr>
-              <a:tr h="329184">
-                <a:tc>
-                  <a:txBody>
-                    <a:bodyPr/>
-                    <a:lstStyle/>
-                    <a:p>
-                      <a:pPr indent="0" marL="0">
-                        <a:buNone/>
-                      </a:pPr>
-                      <a:r>
-                        <a:rPr lang="en-US" sz="1300" dirty="0">
-                          <a:solidFill>
-                            <a:srgbClr val="222222"/>
-                          </a:solidFill>
-                          <a:latin typeface="Noto Sans CJK KR" pitchFamily="34" charset="0"/>
-                          <a:ea typeface="Noto Sans CJK KR" pitchFamily="34" charset="-122"/>
-                          <a:cs typeface="Noto Sans CJK KR" pitchFamily="34" charset="-120"/>
-                        </a:rPr>
-                        <a:t>약한 타이밍 오류 (가드 경계 수신)</a:t>
-                      </a:r>
-                      <a:endParaRPr lang="en-US" sz="1300" dirty="0">
-                        <a:latin typeface="Noto Sans CJK KR" charset="0"/>
-                        <a:ea typeface="Noto Sans CJK KR" charset="0"/>
-                        <a:cs typeface="Noto Sans CJK KR" charset="0"/>
-                      </a:endParaRPr>
-                    </a:p>
-                  </a:txBody>
-                  <a:tcPr marL="91440" marR="91440" marT="45720" marB="45720">
-                    <a:lnL w="6350" cap="flat" cmpd="sng" algn="ctr">
-                      <a:solidFill>
-                        <a:srgbClr val="CCCCCC"/>
-                      </a:solidFill>
-                      <a:prstDash val="solid"/>
-                      <a:round/>
-                      <a:headEnd type="none" w="med" len="med"/>
-                      <a:tailEnd type="none" w="med" len="med"/>
-                    </a:lnL>
-                    <a:lnR w="6350" cap="flat" cmpd="sng" algn="ctr">
-                      <a:solidFill>
-                        <a:srgbClr val="CCCCCC"/>
-                      </a:solidFill>
-                      <a:prstDash val="solid"/>
-                      <a:round/>
-                      <a:headEnd type="none" w="med" len="med"/>
-                      <a:tailEnd type="none" w="med" len="med"/>
-                    </a:lnR>
-                    <a:lnT w="6350" cap="flat" cmpd="sng" algn="ctr">
-                      <a:solidFill>
-                        <a:srgbClr val="CCCCCC"/>
-                      </a:solidFill>
-                      <a:prstDash val="solid"/>
-                      <a:round/>
-                      <a:headEnd type="none" w="med" len="med"/>
-                      <a:tailEnd type="none" w="med" len="med"/>
-                    </a:lnT>
-                    <a:lnB w="6350" cap="flat" cmpd="sng" algn="ctr">
-                      <a:solidFill>
-                        <a:srgbClr val="CCCCCC"/>
-                      </a:solidFill>
-                      <a:prstDash val="solid"/>
-                      <a:round/>
-                      <a:headEnd type="none" w="med" len="med"/>
-                      <a:tailEnd type="none" w="med" len="med"/>
-                    </a:lnB>
-                  </a:tcPr>
-                </a:tc>
-                <a:tc>
-                  <a:txBody>
-                    <a:bodyPr/>
-                    <a:lstStyle/>
-                    <a:p>
-                      <a:pPr indent="0" marL="0">
-                        <a:buNone/>
-                      </a:pPr>
-                      <a:r>
-                        <a:rPr lang="en-US" sz="1300" dirty="0">
-                          <a:solidFill>
-                            <a:srgbClr val="222222"/>
-                          </a:solidFill>
-                          <a:latin typeface="Noto Sans CJK KR" pitchFamily="34" charset="0"/>
-                          <a:ea typeface="Noto Sans CJK KR" pitchFamily="34" charset="-122"/>
-                          <a:cs typeface="Noto Sans CJK KR" pitchFamily="34" charset="-120"/>
-                        </a:rPr>
-                        <a:t>slot_timeout_cnt +6 (없으면 매 사이클 -1로 감쇠)</a:t>
-                      </a:r>
-                      <a:endParaRPr lang="en-US" sz="1300" dirty="0">
-                        <a:latin typeface="Noto Sans CJK KR" charset="0"/>
-                        <a:ea typeface="Noto Sans CJK KR" charset="0"/>
-                        <a:cs typeface="Noto Sans CJK KR" charset="0"/>
-                      </a:endParaRPr>
-                    </a:p>
-                  </a:txBody>
-                  <a:tcPr marL="91440" marR="91440" marT="45720" marB="45720">
-                    <a:lnL w="6350" cap="flat" cmpd="sng" algn="ctr">
-                      <a:solidFill>
-                        <a:srgbClr val="CCCCCC"/>
-                      </a:solidFill>
-                      <a:prstDash val="solid"/>
-                      <a:round/>
-                      <a:headEnd type="none" w="med" len="med"/>
-                      <a:tailEnd type="none" w="med" len="med"/>
-                    </a:lnL>
-                    <a:lnR w="6350" cap="flat" cmpd="sng" algn="ctr">
-                      <a:solidFill>
-                        <a:srgbClr val="CCCCCC"/>
-                      </a:solidFill>
-                      <a:prstDash val="solid"/>
-                      <a:round/>
-                      <a:headEnd type="none" w="med" len="med"/>
-                      <a:tailEnd type="none" w="med" len="med"/>
-                    </a:lnR>
-                    <a:lnT w="6350" cap="flat" cmpd="sng" algn="ctr">
-                      <a:solidFill>
-                        <a:srgbClr val="CCCCCC"/>
-                      </a:solidFill>
-                      <a:prstDash val="solid"/>
-                      <a:round/>
-                      <a:headEnd type="none" w="med" len="med"/>
-                      <a:tailEnd type="none" w="med" len="med"/>
-                    </a:lnT>
-                    <a:lnB w="6350" cap="flat" cmpd="sng" algn="ctr">
-                      <a:solidFill>
-                        <a:srgbClr val="CCCCCC"/>
-                      </a:solidFill>
-                      <a:prstDash val="solid"/>
-                      <a:round/>
-                      <a:headEnd type="none" w="med" len="med"/>
-                      <a:tailEnd type="none" w="med" len="med"/>
-                    </a:lnB>
-                  </a:tcPr>
-                </a:tc>
-              </a:tr>
-              <a:tr h="329184">
-                <a:tc>
-                  <a:txBody>
-                    <a:bodyPr/>
-                    <a:lstStyle/>
-                    <a:p>
-                      <a:pPr indent="0" marL="0">
-                        <a:buNone/>
-                      </a:pPr>
-                      <a:r>
-                        <a:rPr lang="en-US" sz="1300" dirty="0">
-                          <a:solidFill>
-                            <a:srgbClr val="222222"/>
-                          </a:solidFill>
-                          <a:latin typeface="Noto Sans CJK KR" pitchFamily="34" charset="0"/>
-                          <a:ea typeface="Noto Sans CJK KR" pitchFamily="34" charset="-122"/>
-                          <a:cs typeface="Noto Sans CJK KR" pitchFamily="34" charset="-120"/>
-                        </a:rPr>
-                        <a:t>Hamming 1비트 정정 가능 오류</a:t>
-                      </a:r>
-                      <a:endParaRPr lang="en-US" sz="1300" dirty="0">
-                        <a:latin typeface="Noto Sans CJK KR" charset="0"/>
-                        <a:ea typeface="Noto Sans CJK KR" charset="0"/>
-                        <a:cs typeface="Noto Sans CJK KR" charset="0"/>
-                      </a:endParaRPr>
-                    </a:p>
-                  </a:txBody>
-                  <a:tcPr marL="91440" marR="91440" marT="45720" marB="45720">
-                    <a:lnL w="6350" cap="flat" cmpd="sng" algn="ctr">
-                      <a:solidFill>
-                        <a:srgbClr val="CCCCCC"/>
-                      </a:solidFill>
-                      <a:prstDash val="solid"/>
-                      <a:round/>
-                      <a:headEnd type="none" w="med" len="med"/>
-                      <a:tailEnd type="none" w="med" len="med"/>
-                    </a:lnL>
-                    <a:lnR w="6350" cap="flat" cmpd="sng" algn="ctr">
-                      <a:solidFill>
-                        <a:srgbClr val="CCCCCC"/>
-                      </a:solidFill>
-                      <a:prstDash val="solid"/>
-                      <a:round/>
-                      <a:headEnd type="none" w="med" len="med"/>
-                      <a:tailEnd type="none" w="med" len="med"/>
-                    </a:lnR>
-                    <a:lnT w="6350" cap="flat" cmpd="sng" algn="ctr">
-                      <a:solidFill>
-                        <a:srgbClr val="CCCCCC"/>
-                      </a:solidFill>
-                      <a:prstDash val="solid"/>
-                      <a:round/>
-                      <a:headEnd type="none" w="med" len="med"/>
-                      <a:tailEnd type="none" w="med" len="med"/>
-                    </a:lnT>
-                    <a:lnB w="6350" cap="flat" cmpd="sng" algn="ctr">
-                      <a:solidFill>
-                        <a:srgbClr val="CCCCCC"/>
-                      </a:solidFill>
-                      <a:prstDash val="solid"/>
-                      <a:round/>
-                      <a:headEnd type="none" w="med" len="med"/>
-                      <a:tailEnd type="none" w="med" len="med"/>
-                    </a:lnB>
-                  </a:tcPr>
-                </a:tc>
-                <a:tc>
-                  <a:txBody>
-                    <a:bodyPr/>
-                    <a:lstStyle/>
-                    <a:p>
-                      <a:pPr indent="0" marL="0">
-                        <a:buNone/>
-                      </a:pPr>
-                      <a:r>
-                        <a:rPr lang="en-US" sz="1300" dirty="0">
-                          <a:solidFill>
-                            <a:srgbClr val="222222"/>
-                          </a:solidFill>
-                          <a:latin typeface="Noto Sans CJK KR" pitchFamily="34" charset="0"/>
-                          <a:ea typeface="Noto Sans CJK KR" pitchFamily="34" charset="-122"/>
-                          <a:cs typeface="Noto Sans CJK KR" pitchFamily="34" charset="-120"/>
-                        </a:rPr>
-                        <a:t>데이터는 정정 수용, hamming_err_cnt +4</a:t>
-                      </a:r>
-                      <a:endParaRPr lang="en-US" sz="1300" dirty="0">
-                        <a:latin typeface="Noto Sans CJK KR" charset="0"/>
-                        <a:ea typeface="Noto Sans CJK KR" charset="0"/>
-                        <a:cs typeface="Noto Sans CJK KR" charset="0"/>
-                      </a:endParaRPr>
-                    </a:p>
-                  </a:txBody>
-                  <a:tcPr marL="91440" marR="91440" marT="45720" marB="45720">
-                    <a:lnL w="6350" cap="flat" cmpd="sng" algn="ctr">
-                      <a:solidFill>
-                        <a:srgbClr val="CCCCCC"/>
-                      </a:solidFill>
-                      <a:prstDash val="solid"/>
-                      <a:round/>
-                      <a:headEnd type="none" w="med" len="med"/>
-                      <a:tailEnd type="none" w="med" len="med"/>
-                    </a:lnL>
-                    <a:lnR w="6350" cap="flat" cmpd="sng" algn="ctr">
-                      <a:solidFill>
-                        <a:srgbClr val="CCCCCC"/>
-                      </a:solidFill>
-                      <a:prstDash val="solid"/>
-                      <a:round/>
-                      <a:headEnd type="none" w="med" len="med"/>
-                      <a:tailEnd type="none" w="med" len="med"/>
-                    </a:lnR>
-                    <a:lnT w="6350" cap="flat" cmpd="sng" algn="ctr">
-                      <a:solidFill>
-                        <a:srgbClr val="CCCCCC"/>
-                      </a:solidFill>
-                      <a:prstDash val="solid"/>
-                      <a:round/>
-                      <a:headEnd type="none" w="med" len="med"/>
-                      <a:tailEnd type="none" w="med" len="med"/>
-                    </a:lnT>
-                    <a:lnB w="6350" cap="flat" cmpd="sng" algn="ctr">
-                      <a:solidFill>
-                        <a:srgbClr val="CCCCCC"/>
-                      </a:solidFill>
-                      <a:prstDash val="solid"/>
-                      <a:round/>
-                      <a:headEnd type="none" w="med" len="med"/>
-                      <a:tailEnd type="none" w="med" len="med"/>
-                    </a:lnB>
-                  </a:tcPr>
-                </a:tc>
-              </a:tr>
-              <a:tr h="329184">
-                <a:tc>
-                  <a:txBody>
-                    <a:bodyPr/>
-                    <a:lstStyle/>
-                    <a:p>
-                      <a:pPr indent="0" marL="0">
-                        <a:buNone/>
-                      </a:pPr>
-                      <a:r>
-                        <a:rPr lang="en-US" sz="1300" dirty="0">
-                          <a:solidFill>
-                            <a:srgbClr val="222222"/>
-                          </a:solidFill>
-                          <a:latin typeface="Noto Sans CJK KR" pitchFamily="34" charset="0"/>
-                          <a:ea typeface="Noto Sans CJK KR" pitchFamily="34" charset="-122"/>
-                          <a:cs typeface="Noto Sans CJK KR" pitchFamily="34" charset="-120"/>
-                        </a:rPr>
-                        <a:t>Hamming 2비트 정정 불가 오류</a:t>
-                      </a:r>
-                      <a:endParaRPr lang="en-US" sz="1300" dirty="0">
-                        <a:latin typeface="Noto Sans CJK KR" charset="0"/>
-                        <a:ea typeface="Noto Sans CJK KR" charset="0"/>
-                        <a:cs typeface="Noto Sans CJK KR" charset="0"/>
-                      </a:endParaRPr>
-                    </a:p>
-                  </a:txBody>
-                  <a:tcPr marL="91440" marR="91440" marT="45720" marB="45720">
-                    <a:lnL w="6350" cap="flat" cmpd="sng" algn="ctr">
-                      <a:solidFill>
-                        <a:srgbClr val="CCCCCC"/>
-                      </a:solidFill>
-                      <a:prstDash val="solid"/>
-                      <a:round/>
-                      <a:headEnd type="none" w="med" len="med"/>
-                      <a:tailEnd type="none" w="med" len="med"/>
-                    </a:lnL>
-                    <a:lnR w="6350" cap="flat" cmpd="sng" algn="ctr">
-                      <a:solidFill>
-                        <a:srgbClr val="CCCCCC"/>
-                      </a:solidFill>
-                      <a:prstDash val="solid"/>
-                      <a:round/>
-                      <a:headEnd type="none" w="med" len="med"/>
-                      <a:tailEnd type="none" w="med" len="med"/>
-                    </a:lnR>
-                    <a:lnT w="6350" cap="flat" cmpd="sng" algn="ctr">
-                      <a:solidFill>
-                        <a:srgbClr val="CCCCCC"/>
-                      </a:solidFill>
-                      <a:prstDash val="solid"/>
-                      <a:round/>
-                      <a:headEnd type="none" w="med" len="med"/>
-                      <a:tailEnd type="none" w="med" len="med"/>
-                    </a:lnT>
-                    <a:lnB w="6350" cap="flat" cmpd="sng" algn="ctr">
-                      <a:solidFill>
-                        <a:srgbClr val="CCCCCC"/>
-                      </a:solidFill>
-                      <a:prstDash val="solid"/>
-                      <a:round/>
-                      <a:headEnd type="none" w="med" len="med"/>
-                      <a:tailEnd type="none" w="med" len="med"/>
-                    </a:lnB>
-                  </a:tcPr>
-                </a:tc>
-                <a:tc>
-                  <a:txBody>
-                    <a:bodyPr/>
-                    <a:lstStyle/>
-                    <a:p>
-                      <a:pPr indent="0" marL="0">
-                        <a:buNone/>
-                      </a:pPr>
-                      <a:r>
-                        <a:rPr lang="en-US" sz="1300" dirty="0">
-                          <a:solidFill>
-                            <a:srgbClr val="222222"/>
-                          </a:solidFill>
-                          <a:latin typeface="Noto Sans CJK KR" pitchFamily="34" charset="0"/>
-                          <a:ea typeface="Noto Sans CJK KR" pitchFamily="34" charset="-122"/>
-                          <a:cs typeface="Noto Sans CJK KR" pitchFamily="34" charset="-120"/>
-                        </a:rPr>
-                        <a:t>프레임 폐기(이전 값 유지), hamming_err_cnt +8</a:t>
-                      </a:r>
-                      <a:endParaRPr lang="en-US" sz="1300" dirty="0">
-                        <a:latin typeface="Noto Sans CJK KR" charset="0"/>
-                        <a:ea typeface="Noto Sans CJK KR" charset="0"/>
-                        <a:cs typeface="Noto Sans CJK KR" charset="0"/>
-                      </a:endParaRPr>
-                    </a:p>
-                  </a:txBody>
-                  <a:tcPr marL="91440" marR="91440" marT="45720" marB="45720">
-                    <a:lnL w="6350" cap="flat" cmpd="sng" algn="ctr">
-                      <a:solidFill>
-                        <a:srgbClr val="CCCCCC"/>
-                      </a:solidFill>
-                      <a:prstDash val="solid"/>
-                      <a:round/>
-                      <a:headEnd type="none" w="med" len="med"/>
-                      <a:tailEnd type="none" w="med" len="med"/>
-                    </a:lnL>
-                    <a:lnR w="6350" cap="flat" cmpd="sng" algn="ctr">
-                      <a:solidFill>
-                        <a:srgbClr val="CCCCCC"/>
-                      </a:solidFill>
-                      <a:prstDash val="solid"/>
-                      <a:round/>
-                      <a:headEnd type="none" w="med" len="med"/>
-                      <a:tailEnd type="none" w="med" len="med"/>
-                    </a:lnR>
-                    <a:lnT w="6350" cap="flat" cmpd="sng" algn="ctr">
-                      <a:solidFill>
-                        <a:srgbClr val="CCCCCC"/>
-                      </a:solidFill>
-                      <a:prstDash val="solid"/>
-                      <a:round/>
-                      <a:headEnd type="none" w="med" len="med"/>
-                      <a:tailEnd type="none" w="med" len="med"/>
-                    </a:lnT>
-                    <a:lnB w="6350" cap="flat" cmpd="sng" algn="ctr">
-                      <a:solidFill>
-                        <a:srgbClr val="CCCCCC"/>
-                      </a:solidFill>
-                      <a:prstDash val="solid"/>
-                      <a:round/>
-                      <a:headEnd type="none" w="med" len="med"/>
-                      <a:tailEnd type="none" w="med" len="med"/>
-                    </a:lnB>
-                  </a:tcPr>
-                </a:tc>
-              </a:tr>
-              <a:tr h="329184">
-                <a:tc>
-                  <a:txBody>
-                    <a:bodyPr/>
-                    <a:lstStyle/>
-                    <a:p>
-                      <a:pPr indent="0" marL="0">
-                        <a:buNone/>
-                      </a:pPr>
-                      <a:r>
-                        <a:rPr lang="en-US" sz="1300" dirty="0">
-                          <a:solidFill>
-                            <a:srgbClr val="222222"/>
-                          </a:solidFill>
-                          <a:latin typeface="Noto Sans CJK KR" pitchFamily="34" charset="0"/>
-                          <a:ea typeface="Noto Sans CJK KR" pitchFamily="34" charset="-122"/>
-                          <a:cs typeface="Noto Sans CJK KR" pitchFamily="34" charset="-120"/>
-                        </a:rPr>
-                        <a:t>무응답 (silent)</a:t>
-                      </a:r>
-                      <a:endParaRPr lang="en-US" sz="1300" dirty="0">
-                        <a:latin typeface="Noto Sans CJK KR" charset="0"/>
-                        <a:ea typeface="Noto Sans CJK KR" charset="0"/>
-                        <a:cs typeface="Noto Sans CJK KR" charset="0"/>
-                      </a:endParaRPr>
-                    </a:p>
-                  </a:txBody>
-                  <a:tcPr marL="91440" marR="91440" marT="45720" marB="45720">
-                    <a:lnL w="6350" cap="flat" cmpd="sng" algn="ctr">
-                      <a:solidFill>
-                        <a:srgbClr val="CCCCCC"/>
-                      </a:solidFill>
-                      <a:prstDash val="solid"/>
-                      <a:round/>
-                      <a:headEnd type="none" w="med" len="med"/>
-                      <a:tailEnd type="none" w="med" len="med"/>
-                    </a:lnL>
-                    <a:lnR w="6350" cap="flat" cmpd="sng" algn="ctr">
-                      <a:solidFill>
-                        <a:srgbClr val="CCCCCC"/>
-                      </a:solidFill>
-                      <a:prstDash val="solid"/>
-                      <a:round/>
-                      <a:headEnd type="none" w="med" len="med"/>
-                      <a:tailEnd type="none" w="med" len="med"/>
-                    </a:lnR>
-                    <a:lnT w="6350" cap="flat" cmpd="sng" algn="ctr">
-                      <a:solidFill>
-                        <a:srgbClr val="CCCCCC"/>
-                      </a:solidFill>
-                      <a:prstDash val="solid"/>
-                      <a:round/>
-                      <a:headEnd type="none" w="med" len="med"/>
-                      <a:tailEnd type="none" w="med" len="med"/>
-                    </a:lnT>
-                    <a:lnB w="6350" cap="flat" cmpd="sng" algn="ctr">
-                      <a:solidFill>
-                        <a:srgbClr val="CCCCCC"/>
-                      </a:solidFill>
-                      <a:prstDash val="solid"/>
-                      <a:round/>
-                      <a:headEnd type="none" w="med" len="med"/>
-                      <a:tailEnd type="none" w="med" len="med"/>
-                    </a:lnB>
-                  </a:tcPr>
-                </a:tc>
-                <a:tc>
-                  <a:txBody>
-                    <a:bodyPr/>
-                    <a:lstStyle/>
-                    <a:p>
-                      <a:pPr indent="0" marL="0">
-                        <a:buNone/>
-                      </a:pPr>
-                      <a:r>
-                        <a:rPr lang="en-US" sz="1300" dirty="0">
-                          <a:solidFill>
-                            <a:srgbClr val="222222"/>
-                          </a:solidFill>
-                          <a:latin typeface="Noto Sans CJK KR" pitchFamily="34" charset="0"/>
-                          <a:ea typeface="Noto Sans CJK KR" pitchFamily="34" charset="-122"/>
-                          <a:cs typeface="Noto Sans CJK KR" pitchFamily="34" charset="-120"/>
-                        </a:rPr>
-                        <a:t>silent_cnt +6 — 표시만 하고 halt_cmd 판정에는 미포함</a:t>
-                      </a:r>
-                      <a:endParaRPr lang="en-US" sz="1300" dirty="0">
-                        <a:latin typeface="Noto Sans CJK KR" charset="0"/>
-                        <a:ea typeface="Noto Sans CJK KR" charset="0"/>
-                        <a:cs typeface="Noto Sans CJK KR" charset="0"/>
-                      </a:endParaRPr>
-                    </a:p>
-                  </a:txBody>
-                  <a:tcPr marL="91440" marR="91440" marT="45720" marB="45720">
-                    <a:lnL w="6350" cap="flat" cmpd="sng" algn="ctr">
-                      <a:solidFill>
-                        <a:srgbClr val="CCCCCC"/>
-                      </a:solidFill>
-                      <a:prstDash val="solid"/>
-                      <a:round/>
-                      <a:headEnd type="none" w="med" len="med"/>
-                      <a:tailEnd type="none" w="med" len="med"/>
-                    </a:lnL>
-                    <a:lnR w="6350" cap="flat" cmpd="sng" algn="ctr">
-                      <a:solidFill>
-                        <a:srgbClr val="CCCCCC"/>
-                      </a:solidFill>
-                      <a:prstDash val="solid"/>
-                      <a:round/>
-                      <a:headEnd type="none" w="med" len="med"/>
-                      <a:tailEnd type="none" w="med" len="med"/>
-                    </a:lnR>
-                    <a:lnT w="6350" cap="flat" cmpd="sng" algn="ctr">
-                      <a:solidFill>
-                        <a:srgbClr val="CCCCCC"/>
-                      </a:solidFill>
-                      <a:prstDash val="solid"/>
-                      <a:round/>
-                      <a:headEnd type="none" w="med" len="med"/>
-                      <a:tailEnd type="none" w="med" len="med"/>
-                    </a:lnT>
-                    <a:lnB w="6350" cap="flat" cmpd="sng" algn="ctr">
-                      <a:solidFill>
-                        <a:srgbClr val="CCCCCC"/>
-                      </a:solidFill>
-                      <a:prstDash val="solid"/>
-                      <a:round/>
-                      <a:headEnd type="none" w="med" len="med"/>
-                      <a:tailEnd type="none" w="med" len="med"/>
-                    </a:lnB>
-                  </a:tcPr>
-                </a:tc>
-              </a:tr>
-            </a:tbl>
-          </a:graphicData>
-        </a:graphic>
-      </p:graphicFrame>
+      <p:pic>
+        <p:nvPicPr>
+          <p:cNvPr id="4" name="Image 0" descr="/home/user/SoC_Design_and_Programming/diagrams/section3/zoom/slave_halt_flow.png">    </p:cNvPr>
+          <p:cNvPicPr>
+            <a:picLocks noChangeAspect="1"/>
+          </p:cNvPicPr>
+          <p:nvPr/>
+        </p:nvPicPr>
+        <p:blipFill>
+          <a:blip r:embed="rId1"/>
+          <a:srcRect l="0" r="0" t="0" b="0"/>
+          <a:stretch/>
+        </p:blipFill>
+        <p:spPr>
+          <a:xfrm>
+            <a:off x="6008052" y="1097280"/>
+            <a:ext cx="876936" cy="3200400"/>
+          </a:xfrm>
+          <a:prstGeom prst="rect">
+            <a:avLst/>
+          </a:prstGeom>
+        </p:spPr>
+      </p:pic>
       <p:sp>
         <p:nvSpPr>
           <p:cNvPr id="5" name="Text 2"/>
@@ -5627,215 +4330,6 @@
                 <a:cs typeface="Noto Sans CJK KR" pitchFamily="34" charset="-120"/>
               </a:rPr>
               <a:t>8</a:t>
-            </a:r>
-            <a:endParaRPr lang="en-US" sz="1200" dirty="0"/>
-          </a:p>
-        </p:txBody>
-      </p:sp>
-    </p:spTree>
-  </p:cSld>
-  <p:clrMapOvr>
-    <a:masterClrMapping/>
-  </p:clrMapOvr>
-</p:sld>
-</file>
-
-<file path=ppt/slides/slide9.xml><?xml version="1.0" encoding="utf-8"?>
-<p:sld xmlns:a="http://schemas.openxmlformats.org/drawingml/2006/main" xmlns:r="http://schemas.openxmlformats.org/officeDocument/2006/relationships" xmlns:p="http://schemas.openxmlformats.org/presentationml/2006/main">
-  <p:cSld name="Slide 9">
-    <p:spTree>
-      <p:nvGrpSpPr>
-        <p:cNvPr id="1" name=""/>
-        <p:cNvGrpSpPr/>
-        <p:nvPr/>
-      </p:nvGrpSpPr>
-      <p:grpSpPr>
-        <a:xfrm>
-          <a:off x="0" y="0"/>
-          <a:ext cx="0" cy="0"/>
-          <a:chOff x="0" y="0"/>
-          <a:chExt cx="0" cy="0"/>
-        </a:xfrm>
-      </p:grpSpPr>
-      <p:sp>
-        <p:nvSpPr>
-          <p:cNvPr id="2" name="Text 0"/>
-          <p:cNvSpPr/>
-          <p:nvPr/>
-        </p:nvSpPr>
-        <p:spPr>
-          <a:xfrm>
-            <a:off x="548640" y="274320"/>
-            <a:ext cx="8046720" cy="777240"/>
-          </a:xfrm>
-          <a:prstGeom prst="rect">
-            <a:avLst/>
-          </a:prstGeom>
-          <a:noFill/>
-          <a:ln/>
-        </p:spPr>
-        <p:txBody>
-          <a:bodyPr wrap="square" lIns="0" tIns="0" rIns="0" bIns="0" rtlCol="0" anchor="ctr"/>
-          <a:lstStyle/>
-          <a:p>
-            <a:pPr indent="0" marL="0">
-              <a:buNone/>
-            </a:pPr>
-            <a:r>
-              <a:rPr lang="en-US" sz="3600" b="1" dirty="0">
-                <a:solidFill>
-                  <a:srgbClr val="111111"/>
-                </a:solidFill>
-                <a:latin typeface="Noto Sans CJK KR" pitchFamily="34" charset="0"/>
-                <a:ea typeface="Noto Sans CJK KR" pitchFamily="34" charset="-122"/>
-                <a:cs typeface="Noto Sans CJK KR" pitchFamily="34" charset="-120"/>
-              </a:rPr>
-              <a:t>종합 판정과 halt_cmd</a:t>
-            </a:r>
-            <a:endParaRPr lang="en-US" sz="3600" dirty="0"/>
-          </a:p>
-        </p:txBody>
-      </p:sp>
-      <p:sp>
-        <p:nvSpPr>
-          <p:cNvPr id="3" name="Text 1"/>
-          <p:cNvSpPr/>
-          <p:nvPr/>
-        </p:nvSpPr>
-        <p:spPr>
-          <a:xfrm>
-            <a:off x="548640" y="1234440"/>
-            <a:ext cx="8046720" cy="2971800"/>
-          </a:xfrm>
-          <a:prstGeom prst="rect">
-            <a:avLst/>
-          </a:prstGeom>
-          <a:noFill/>
-          <a:ln/>
-        </p:spPr>
-        <p:txBody>
-          <a:bodyPr wrap="square" rtlCol="0" anchor="t"/>
-          <a:lstStyle/>
-          <a:p>
-            <a:pPr marL="342900" indent="-342900">
-              <a:spcAft>
-                <a:spcPts val="1200"/>
-              </a:spcAft>
-              <a:buSzPct val="100000"/>
-              <a:buChar char="•"/>
-            </a:pPr>
-            <a:r>
-              <a:rPr lang="en-US" sz="2000" dirty="0">
-                <a:solidFill>
-                  <a:srgbClr val="222222"/>
-                </a:solidFill>
-                <a:latin typeface="Noto Sans CJK KR" pitchFamily="34" charset="0"/>
-                <a:ea typeface="Noto Sans CJK KR" pitchFamily="34" charset="-122"/>
-                <a:cs typeface="Noto Sans CJK KR" pitchFamily="34" charset="-120"/>
-              </a:rPr>
-              <a:t>(preamble_err_cnt + slot_timeout_cnt + hamming_err_cnt) &gt; FAULT_TH 이면 해당 슬롯 halt_cmd = 1</a:t>
-            </a:r>
-            <a:endParaRPr lang="en-US" sz="2000" dirty="0"/>
-          </a:p>
-          <a:p>
-            <a:pPr marL="342900" indent="-342900">
-              <a:spcAft>
-                <a:spcPts val="1200"/>
-              </a:spcAft>
-              <a:buSzPct val="100000"/>
-              <a:buChar char="•"/>
-            </a:pPr>
-            <a:r>
-              <a:rPr lang="en-US" sz="2000" dirty="0">
-                <a:solidFill>
-                  <a:srgbClr val="222222"/>
-                </a:solidFill>
-                <a:latin typeface="Noto Sans CJK KR" pitchFamily="34" charset="0"/>
-                <a:ea typeface="Noto Sans CJK KR" pitchFamily="34" charset="-122"/>
-                <a:cs typeface="Noto Sans CJK KR" pitchFamily="34" charset="-120"/>
-              </a:rPr>
-              <a:t>silent_cnt는 이 종합 판정에서 제외됨</a:t>
-            </a:r>
-            <a:endParaRPr lang="en-US" sz="2000" dirty="0"/>
-          </a:p>
-          <a:p>
-            <a:pPr marL="342900" indent="-342900">
-              <a:spcAft>
-                <a:spcPts val="1200"/>
-              </a:spcAft>
-              <a:buSzPct val="100000"/>
-              <a:buChar char="•"/>
-            </a:pPr>
-            <a:r>
-              <a:rPr lang="en-US" sz="2000" dirty="0">
-                <a:solidFill>
-                  <a:srgbClr val="222222"/>
-                </a:solidFill>
-                <a:latin typeface="Noto Sans CJK KR" pitchFamily="34" charset="0"/>
-                <a:ea typeface="Noto Sans CJK KR" pitchFamily="34" charset="-122"/>
-                <a:cs typeface="Noto Sans CJK KR" pitchFamily="34" charset="-120"/>
-              </a:rPr>
-              <a:t>halt_cmd = 1이 된 슬롯은 이후 카운터가 동결됨</a:t>
-            </a:r>
-            <a:endParaRPr lang="en-US" sz="2000" dirty="0"/>
-          </a:p>
-          <a:p>
-            <a:pPr marL="342900" indent="-342900">
-              <a:spcAft>
-                <a:spcPts val="1200"/>
-              </a:spcAft>
-              <a:buSzPct val="100000"/>
-              <a:buChar char="•"/>
-            </a:pPr>
-            <a:r>
-              <a:rPr lang="en-US" sz="2000" dirty="0">
-                <a:solidFill>
-                  <a:srgbClr val="222222"/>
-                </a:solidFill>
-                <a:latin typeface="Noto Sans CJK KR" pitchFamily="34" charset="0"/>
-                <a:ea typeface="Noto Sans CJK KR" pitchFamily="34" charset="-122"/>
-                <a:cs typeface="Noto Sans CJK KR" pitchFamily="34" charset="-120"/>
-              </a:rPr>
-              <a:t>Master가 브로드캐스트 프레임에 halt_cmd를 실어 모든 Slave에 전송</a:t>
-            </a:r>
-            <a:endParaRPr lang="en-US" sz="2000" dirty="0"/>
-          </a:p>
-        </p:txBody>
-      </p:sp>
-      <p:sp>
-        <p:nvSpPr>
-          <p:cNvPr id="4" name="Text 2"/>
-          <p:cNvSpPr/>
-          <p:nvPr/>
-        </p:nvSpPr>
-        <p:spPr>
-          <a:xfrm>
-            <a:off x="8503920" y="4754880"/>
-            <a:ext cx="457200" cy="274320"/>
-          </a:xfrm>
-          <a:prstGeom prst="rect">
-            <a:avLst/>
-          </a:prstGeom>
-          <a:noFill/>
-          <a:ln/>
-        </p:spPr>
-        <p:txBody>
-          <a:bodyPr wrap="square" rtlCol="0" anchor="ctr"/>
-          <a:lstStyle/>
-          <a:p>
-            <a:pPr algn="r" indent="0" marL="0">
-              <a:buNone/>
-            </a:pPr>
-            <a:r>
-              <a:rPr lang="en-US" sz="1200" dirty="0">
-                <a:solidFill>
-                  <a:srgbClr val="999999"/>
-                </a:solidFill>
-                <a:latin typeface="Noto Sans CJK KR" pitchFamily="34" charset="0"/>
-                <a:ea typeface="Noto Sans CJK KR" pitchFamily="34" charset="-122"/>
-                <a:cs typeface="Noto Sans CJK KR" pitchFamily="34" charset="-120"/>
-              </a:rPr>
-              <a:t>9</a:t>
             </a:r>
             <a:endParaRPr lang="en-US" sz="1200" dirty="0"/>
           </a:p>

--- a/section3_part2_internals.pptx
+++ b/section3_part2_internals.pptx
@@ -3755,8 +3755,8 @@
         </p:nvSpPr>
         <p:spPr>
           <a:xfrm>
-            <a:off x="548640" y="1234440"/>
-            <a:ext cx="3383280" cy="2971800"/>
+            <a:off x="548640" y="1188720"/>
+            <a:ext cx="8046720" cy="685800"/>
           </a:xfrm>
           <a:prstGeom prst="rect">
             <a:avLst/>
@@ -3770,7 +3770,7 @@
           <a:p>
             <a:pPr marL="342900" indent="-342900">
               <a:spcAft>
-                <a:spcPts val="800"/>
+                <a:spcPts val="600"/>
               </a:spcAft>
               <a:buSzPct val="100000"/>
               <a:buChar char="•"/>
@@ -3791,7 +3791,7 @@
           <a:p>
             <a:pPr marL="342900" indent="-342900">
               <a:spcAft>
-                <a:spcPts val="800"/>
+                <a:spcPts val="600"/>
               </a:spcAft>
               <a:buSzPct val="100000"/>
               <a:buChar char="•"/>
@@ -3812,7 +3812,7 @@
           <a:p>
             <a:pPr marL="342900" indent="-342900">
               <a:spcAft>
-                <a:spcPts val="800"/>
+                <a:spcPts val="600"/>
               </a:spcAft>
               <a:buSzPct val="100000"/>
               <a:buChar char="•"/>
@@ -3833,7 +3833,7 @@
           <a:p>
             <a:pPr marL="342900" indent="-342900">
               <a:spcAft>
-                <a:spcPts val="800"/>
+                <a:spcPts val="600"/>
               </a:spcAft>
               <a:buSzPct val="100000"/>
               <a:buChar char="•"/>
@@ -3868,8 +3868,8 @@
         </p:blipFill>
         <p:spPr>
           <a:xfrm>
-            <a:off x="5843658" y="1097280"/>
-            <a:ext cx="1205725" cy="3200400"/>
+            <a:off x="548640" y="2404499"/>
+            <a:ext cx="8046720" cy="1683242"/>
           </a:xfrm>
           <a:prstGeom prst="rect">
             <a:avLst/>
@@ -4175,8 +4175,8 @@
         </p:nvSpPr>
         <p:spPr>
           <a:xfrm>
-            <a:off x="548640" y="1234440"/>
-            <a:ext cx="3383280" cy="2971800"/>
+            <a:off x="548640" y="1188720"/>
+            <a:ext cx="8046720" cy="685800"/>
           </a:xfrm>
           <a:prstGeom prst="rect">
             <a:avLst/>
@@ -4190,7 +4190,7 @@
           <a:p>
             <a:pPr marL="342900" indent="-342900">
               <a:spcAft>
-                <a:spcPts val="800"/>
+                <a:spcPts val="600"/>
               </a:spcAft>
               <a:buSzPct val="100000"/>
               <a:buChar char="•"/>
@@ -4211,7 +4211,7 @@
           <a:p>
             <a:pPr marL="342900" indent="-342900">
               <a:spcAft>
-                <a:spcPts val="800"/>
+                <a:spcPts val="600"/>
               </a:spcAft>
               <a:buSzPct val="100000"/>
               <a:buChar char="•"/>
@@ -4232,7 +4232,7 @@
           <a:p>
             <a:pPr marL="342900" indent="-342900">
               <a:spcAft>
-                <a:spcPts val="800"/>
+                <a:spcPts val="600"/>
               </a:spcAft>
               <a:buSzPct val="100000"/>
               <a:buChar char="•"/>
@@ -4253,7 +4253,7 @@
           <a:p>
             <a:pPr marL="342900" indent="-342900">
               <a:spcAft>
-                <a:spcPts val="800"/>
+                <a:spcPts val="600"/>
               </a:spcAft>
               <a:buSzPct val="100000"/>
               <a:buChar char="•"/>
@@ -4288,8 +4288,8 @@
         </p:blipFill>
         <p:spPr>
           <a:xfrm>
-            <a:off x="6008052" y="1097280"/>
-            <a:ext cx="876936" cy="3200400"/>
+            <a:off x="548640" y="2291598"/>
+            <a:ext cx="8046720" cy="1909043"/>
           </a:xfrm>
           <a:prstGeom prst="rect">
             <a:avLst/>

--- a/section3_part2_internals.pptx
+++ b/section3_part2_internals.pptx
@@ -1943,7 +1943,7 @@
                 <a:ea typeface="Noto Sans CJK KR" pitchFamily="34" charset="-122"/>
                 <a:cs typeface="Noto Sans CJK KR" pitchFamily="34" charset="-120"/>
               </a:rPr>
-              <a:t>버튼의 디바운스된 단발 펄스마다 슬롯별로 정해진 값만큼 증가</a:t>
+              <a:t>버튼을 누를 때마다 슬롯별로 정해진 값만큼 증가</a:t>
             </a:r>
             <a:endParaRPr lang="en-US" sz="1800" dirty="0"/>
           </a:p>
@@ -3195,45 +3195,6 @@
         </p:nvSpPr>
         <p:spPr>
           <a:xfrm>
-            <a:off x="548640" y="3383280"/>
-            <a:ext cx="8046720" cy="640080"/>
-          </a:xfrm>
-          <a:prstGeom prst="rect">
-            <a:avLst/>
-          </a:prstGeom>
-          <a:noFill/>
-          <a:ln/>
-        </p:spPr>
-        <p:txBody>
-          <a:bodyPr wrap="square" rtlCol="0" anchor="t"/>
-          <a:lstStyle/>
-          <a:p>
-            <a:pPr indent="0" marL="0">
-              <a:buNone/>
-            </a:pPr>
-            <a:r>
-              <a:rPr lang="en-US" sz="1600" dirty="0">
-                <a:solidFill>
-                  <a:srgbClr val="444444"/>
-                </a:solidFill>
-                <a:latin typeface="Noto Sans CJK KR" pitchFamily="34" charset="0"/>
-                <a:ea typeface="Noto Sans CJK KR" pitchFamily="34" charset="-122"/>
-                <a:cs typeface="Noto Sans CJK KR" pitchFamily="34" charset="-120"/>
-              </a:rPr>
-              <a:t>32비트 payload는 프레임 내부에서 {slot_id(3bit) + payload(32bit)}로 결합된 뒤 Hamming 인코딩되어 50비트 프레임으로 전송됨</a:t>
-            </a:r>
-            <a:endParaRPr lang="en-US" sz="1600" dirty="0"/>
-          </a:p>
-        </p:txBody>
-      </p:sp>
-      <p:sp>
-        <p:nvSpPr>
-          <p:cNvPr id="6" name="Text 3"/>
-          <p:cNvSpPr/>
-          <p:nvPr/>
-        </p:nvSpPr>
-        <p:spPr>
-          <a:xfrm>
             <a:off x="8503920" y="4754880"/>
             <a:ext cx="457200" cy="274320"/>
           </a:xfrm>
@@ -3408,7 +3369,7 @@
                 <a:ea typeface="Noto Sans CJK KR" pitchFamily="34" charset="-122"/>
                 <a:cs typeface="Noto Sans CJK KR" pitchFamily="34" charset="-120"/>
               </a:rPr>
-              <a:t>분주된 비트 구간은 Master가 DIV 클럭, Slave가 (DIV+1) 클럭으로 1클럭만큼 비대칭 — 동일 DIV를 가정해도 실제 주파수는 정확히 같지 않음</a:t>
+              <a:t>분주 클럭은 메인 클럭 / (DIV + 1)</a:t>
             </a:r>
             <a:endParaRPr lang="en-US" sz="2000" dirty="0"/>
           </a:p>
@@ -4016,7 +3977,7 @@
                 <a:ea typeface="Noto Sans CJK KR" pitchFamily="34" charset="-122"/>
                 <a:cs typeface="Noto Sans CJK KR" pitchFamily="34" charset="-120"/>
               </a:rPr>
-              <a:t>Master broadcast 프레임의 halt_cmd(halt_mask) 필드를 수신하면 해당 슬롯을 active_slot에서 제외 → 그 슬롯의 TX가 발행되지 않음</a:t>
+              <a:t>Master broadcast 프레임의 halt_cmd(halt_mask) 필드를 수신하면 해당 슬롯은 송신 중단</a:t>
             </a:r>
             <a:endParaRPr lang="en-US" sz="2000" dirty="0"/>
           </a:p>
@@ -4037,7 +3998,7 @@
                 <a:ea typeface="Noto Sans CJK KR" pitchFamily="34" charset="-122"/>
                 <a:cs typeface="Noto Sans CJK KR" pitchFamily="34" charset="-120"/>
               </a:rPr>
-              <a:t>Master가 다음 broadcast에서 해당 비트를 0으로 보내면 다음 사이클부터 자동으로 재개 — Slave 쪽에서 재시작을 요청하는 로직은 없음</a:t>
+              <a:t>Master가 다음 broadcast에서 해당 비트를 0으로 보내면 다음 사이클부터 자동으로 재개</a:t>
             </a:r>
             <a:endParaRPr lang="en-US" sz="2000" dirty="0"/>
           </a:p>
@@ -4058,7 +4019,7 @@
                 <a:ea typeface="Noto Sans CJK KR" pitchFamily="34" charset="-122"/>
                 <a:cs typeface="Noto Sans CJK KR" pitchFamily="34" charset="-120"/>
               </a:rPr>
-              <a:t>Slave 자체 감지 고장(tx_overlap, slot_timing_invalid, pl_payload6/7_invalid, rx_ham_2bit)은 sticky 플래그로 누적되어 PS에 인터럽트만 발생, 자동 셧다운은 하지 않음</a:t>
+              <a:t>Slave 자체 감지 고장(tx_overlap, slot_timing_invalid, pl_payload6/7_invalid, rx_ham_2bit)은 플래그로 누적되어 인터럽트 신호만 발생, 별도 조치는 없음</a:t>
             </a:r>
             <a:endParaRPr lang="en-US" sz="2000" dirty="0"/>
           </a:p>

--- a/section3_part2_internals.pptx
+++ b/section3_part2_internals.pptx
@@ -4,6 +4,9 @@
   <p:sldMasterIdLst>
     <p:sldMasterId id="2147483648" r:id="rId1"/>
   </p:sldMasterIdLst>
+  <p:notesMasterIdLst>
+    <p:notesMasterId r:id="rId9"/>
+  </p:notesMasterIdLst>
   <p:sldIdLst>
     <p:sldId id="256" r:id="rId2"/>
     <p:sldId id="257" r:id="rId3"/>
@@ -12,12 +15,8 @@
     <p:sldId id="260" r:id="rId6"/>
     <p:sldId id="261" r:id="rId7"/>
     <p:sldId id="262" r:id="rId8"/>
-    <p:sldId id="263" r:id="rId9"/>
   </p:sldIdLst>
-  <p:notesMasterIdLst>
-    <p:notesMasterId r:id="rId10"/>
-  </p:notesMasterIdLst>
-  <p:sldSz cx="9144000" cy="5143500"/>
+  <p:sldSz cx="9144000" cy="5143500" type="screen16x9"/>
   <p:notesSz cx="5143500" cy="9144000"/>
   <p:defaultTextStyle>
     <a:lvl1pPr marL="0" algn="l" defTabSz="914400" rtl="0" eaLnBrk="1" latinLnBrk="0" hangingPunct="1">
@@ -111,6 +110,11 @@
       </a:defRPr>
     </a:lvl9pPr>
   </p:defaultTextStyle>
+  <p:extLst>
+    <p:ext uri="{EFAFB233-063F-42B5-8137-9DF3F51BA10A}">
+      <p15:sldGuideLst xmlns:p15="http://schemas.microsoft.com/office/powerpoint/2012/main"/>
+    </p:ext>
+  </p:extLst>
 </p:presentation>
 </file>
 
@@ -136,240 +140,16 @@
           <a:chExt cx="0" cy="0"/>
         </a:xfrm>
       </p:grpSpPr>
-      <p:sp>
-        <p:nvSpPr>
-          <p:cNvPr id="2" name="Header Placeholder 1"/>
-          <p:cNvSpPr>
-            <a:spLocks noGrp="1"/>
-          </p:cNvSpPr>
-          <p:nvPr>
-            <p:ph type="hdr" sz="quarter"/>
-          </p:nvPr>
-        </p:nvSpPr>
-        <p:spPr>
-          <a:xfrm>
-            <a:off x="0" y="0"/>
-            <a:ext cx="2971800" cy="458788"/>
-          </a:xfrm>
-          <a:prstGeom prst="rect">
-            <a:avLst/>
-          </a:prstGeom>
-        </p:spPr>
-        <p:txBody>
-          <a:bodyPr vert="horz" lIns="91440" tIns="45720" rIns="91440" bIns="45720" rtlCol="0"/>
-          <a:lstStyle>
-            <a:lvl1pPr algn="l">
-              <a:defRPr sz="1200"/>
-            </a:lvl1pPr>
-          </a:lstStyle>
-          <a:p>
-            <a:endParaRPr lang="en-US"/>
-          </a:p>
-        </p:txBody>
-      </p:sp>
-      <p:sp>
-        <p:nvSpPr>
-          <p:cNvPr id="3" name="Date Placeholder 2"/>
-          <p:cNvSpPr>
-            <a:spLocks noGrp="1"/>
-          </p:cNvSpPr>
-          <p:nvPr>
-            <p:ph type="dt" idx="1"/>
-          </p:nvPr>
-        </p:nvSpPr>
-        <p:spPr>
-          <a:xfrm>
-            <a:off x="3884613" y="0"/>
-            <a:ext cx="2971800" cy="458788"/>
-          </a:xfrm>
-          <a:prstGeom prst="rect">
-            <a:avLst/>
-          </a:prstGeom>
-        </p:spPr>
-        <p:txBody>
-          <a:bodyPr vert="horz" lIns="91440" tIns="45720" rIns="91440" bIns="45720" rtlCol="0"/>
-          <a:lstStyle>
-            <a:lvl1pPr algn="r">
-              <a:defRPr sz="1200"/>
-            </a:lvl1pPr>
-          </a:lstStyle>
-          <a:p>
-            <a:fld id="{5282F153-3F37-0F45-9E97-73ACFA13230C}" type="datetimeFigureOut">
-              <a:rPr lang="en-US"/>
-              <a:t>7/23/19</a:t>
-            </a:fld>
-            <a:endParaRPr lang="en-US"/>
-          </a:p>
-        </p:txBody>
-      </p:sp>
-      <p:sp>
-        <p:nvSpPr>
-          <p:cNvPr id="4" name="Slide Image Placeholder 3"/>
-          <p:cNvSpPr>
-            <a:spLocks noGrp="1" noRot="1" noChangeAspect="1"/>
-          </p:cNvSpPr>
-          <p:nvPr>
-            <p:ph type="sldImg" idx="2"/>
-          </p:nvPr>
-        </p:nvSpPr>
-        <p:spPr>
-          <a:xfrm>
-            <a:off x="685800" y="1143000"/>
-            <a:ext cx="5486400" cy="3086100"/>
-          </a:xfrm>
-          <a:prstGeom prst="rect">
-            <a:avLst/>
-          </a:prstGeom>
-          <a:noFill/>
-          <a:ln w="12700">
-            <a:solidFill>
-              <a:prstClr val="black"/>
-            </a:solidFill>
-          </a:ln>
-        </p:spPr>
-        <p:txBody>
-          <a:bodyPr vert="horz" lIns="91440" tIns="45720" rIns="91440" bIns="45720" rtlCol="0" anchor="ctr"/>
-          <a:lstStyle/>
-          <a:p>
-            <a:endParaRPr lang="en-US"/>
-          </a:p>
-        </p:txBody>
-      </p:sp>
-      <p:sp>
-        <p:nvSpPr>
-          <p:cNvPr id="5" name="Notes Placeholder 4"/>
-          <p:cNvSpPr>
-            <a:spLocks noGrp="1"/>
-          </p:cNvSpPr>
-          <p:nvPr>
-            <p:ph type="body" sz="quarter" idx="3"/>
-          </p:nvPr>
-        </p:nvSpPr>
-        <p:spPr>
-          <a:xfrm>
-            <a:off x="685800" y="4400550"/>
-            <a:ext cx="5486400" cy="3600450"/>
-          </a:xfrm>
-          <a:prstGeom prst="rect">
-            <a:avLst/>
-          </a:prstGeom>
-        </p:spPr>
-        <p:txBody>
-          <a:bodyPr vert="horz" lIns="91440" tIns="45720" rIns="91440" bIns="45720" rtlCol="0"/>
-          <a:lstStyle/>
-          <a:p>
-            <a:pPr lvl="0"/>
-            <a:r>
-              <a:rPr lang="en-US"/>
-              <a:t>Click to edit Master text styles</a:t>
-            </a:r>
-          </a:p>
-          <a:p>
-            <a:pPr lvl="1"/>
-            <a:r>
-              <a:rPr lang="en-US"/>
-              <a:t>Second level</a:t>
-            </a:r>
-          </a:p>
-          <a:p>
-            <a:pPr lvl="2"/>
-            <a:r>
-              <a:rPr lang="en-US"/>
-              <a:t>Third level</a:t>
-            </a:r>
-          </a:p>
-          <a:p>
-            <a:pPr lvl="3"/>
-            <a:r>
-              <a:rPr lang="en-US"/>
-              <a:t>Fourth level</a:t>
-            </a:r>
-          </a:p>
-          <a:p>
-            <a:pPr lvl="4"/>
-            <a:r>
-              <a:rPr lang="en-US"/>
-              <a:t>Fifth level</a:t>
-            </a:r>
-          </a:p>
-        </p:txBody>
-      </p:sp>
-      <p:sp>
-        <p:nvSpPr>
-          <p:cNvPr id="6" name="Footer Placeholder 5"/>
-          <p:cNvSpPr>
-            <a:spLocks noGrp="1"/>
-          </p:cNvSpPr>
-          <p:nvPr>
-            <p:ph type="ftr" sz="quarter" idx="4"/>
-          </p:nvPr>
-        </p:nvSpPr>
-        <p:spPr>
-          <a:xfrm>
-            <a:off x="0" y="8685213"/>
-            <a:ext cx="2971800" cy="458787"/>
-          </a:xfrm>
-          <a:prstGeom prst="rect">
-            <a:avLst/>
-          </a:prstGeom>
-        </p:spPr>
-        <p:txBody>
-          <a:bodyPr vert="horz" lIns="91440" tIns="45720" rIns="91440" bIns="45720" rtlCol="0" anchor="b"/>
-          <a:lstStyle>
-            <a:lvl1pPr algn="l">
-              <a:defRPr sz="1200"/>
-            </a:lvl1pPr>
-          </a:lstStyle>
-          <a:p>
-            <a:endParaRPr lang="en-US"/>
-          </a:p>
-        </p:txBody>
-      </p:sp>
-      <p:sp>
-        <p:nvSpPr>
-          <p:cNvPr id="7" name="Slide Number Placeholder 6"/>
-          <p:cNvSpPr>
-            <a:spLocks noGrp="1"/>
-          </p:cNvSpPr>
-          <p:nvPr>
-            <p:ph type="sldNum" sz="quarter" idx="5"/>
-          </p:nvPr>
-        </p:nvSpPr>
-        <p:spPr>
-          <a:xfrm>
-            <a:off x="3884613" y="8685213"/>
-            <a:ext cx="2971800" cy="458787"/>
-          </a:xfrm>
-          <a:prstGeom prst="rect">
-            <a:avLst/>
-          </a:prstGeom>
-        </p:spPr>
-        <p:txBody>
-          <a:bodyPr vert="horz" lIns="91440" tIns="45720" rIns="91440" bIns="45720" rtlCol="0" anchor="b"/>
-          <a:lstStyle>
-            <a:lvl1pPr algn="r">
-              <a:defRPr sz="1200"/>
-            </a:lvl1pPr>
-          </a:lstStyle>
-          <a:p>
-            <a:fld id="{CE5E9CC1-C706-0F49-92D6-E571CC5EEA8F}" type="slidenum">
-              <a:rPr lang="en-US"/>
-              <a:t>‹#›</a:t>
-            </a:fld>
-            <a:endParaRPr lang="en-US"/>
-          </a:p>
-        </p:txBody>
-      </p:sp>
     </p:spTree>
     <p:extLst>
       <p:ext uri="{BB962C8B-B14F-4D97-AF65-F5344CB8AC3E}">
-        <p14:creationId xmlns:p14="http://schemas.microsoft.com/office/powerpoint/2010/main" val="1024086991"/>
+        <p14:creationId xmlns:p14="http://schemas.microsoft.com/office/powerpoint/2010/main" val="1821654246"/>
       </p:ext>
     </p:extLst>
   </p:cSld>
   <p:clrMap bg1="lt1" tx1="dk1" bg2="lt2" tx2="dk2" accent1="accent1" accent2="accent2" accent3="accent3" accent4="accent4" accent5="accent5" accent6="accent6" hlink="hlink" folHlink="folHlink"/>
   <p:notesStyle>
-    <a:lvl1pPr marL="0" algn="l" defTabSz="914400" rtl="0" eaLnBrk="1" latinLnBrk="0" hangingPunct="1">
+    <a:lvl1pPr marL="0" algn="l" defTabSz="914400" rtl="0" eaLnBrk="1" latinLnBrk="1" hangingPunct="1">
       <a:defRPr sz="1200" kern="1200">
         <a:solidFill>
           <a:schemeClr val="tx1"/>
@@ -379,7 +159,7 @@
         <a:cs typeface="+mn-cs"/>
       </a:defRPr>
     </a:lvl1pPr>
-    <a:lvl2pPr marL="457200" algn="l" defTabSz="914400" rtl="0" eaLnBrk="1" latinLnBrk="0" hangingPunct="1">
+    <a:lvl2pPr marL="457200" algn="l" defTabSz="914400" rtl="0" eaLnBrk="1" latinLnBrk="1" hangingPunct="1">
       <a:defRPr sz="1200" kern="1200">
         <a:solidFill>
           <a:schemeClr val="tx1"/>
@@ -389,7 +169,7 @@
         <a:cs typeface="+mn-cs"/>
       </a:defRPr>
     </a:lvl2pPr>
-    <a:lvl3pPr marL="914400" algn="l" defTabSz="914400" rtl="0" eaLnBrk="1" latinLnBrk="0" hangingPunct="1">
+    <a:lvl3pPr marL="914400" algn="l" defTabSz="914400" rtl="0" eaLnBrk="1" latinLnBrk="1" hangingPunct="1">
       <a:defRPr sz="1200" kern="1200">
         <a:solidFill>
           <a:schemeClr val="tx1"/>
@@ -399,7 +179,7 @@
         <a:cs typeface="+mn-cs"/>
       </a:defRPr>
     </a:lvl3pPr>
-    <a:lvl4pPr marL="1371600" algn="l" defTabSz="914400" rtl="0" eaLnBrk="1" latinLnBrk="0" hangingPunct="1">
+    <a:lvl4pPr marL="1371600" algn="l" defTabSz="914400" rtl="0" eaLnBrk="1" latinLnBrk="1" hangingPunct="1">
       <a:defRPr sz="1200" kern="1200">
         <a:solidFill>
           <a:schemeClr val="tx1"/>
@@ -409,7 +189,7 @@
         <a:cs typeface="+mn-cs"/>
       </a:defRPr>
     </a:lvl4pPr>
-    <a:lvl5pPr marL="1828800" algn="l" defTabSz="914400" rtl="0" eaLnBrk="1" latinLnBrk="0" hangingPunct="1">
+    <a:lvl5pPr marL="1828800" algn="l" defTabSz="914400" rtl="0" eaLnBrk="1" latinLnBrk="1" hangingPunct="1">
       <a:defRPr sz="1200" kern="1200">
         <a:solidFill>
           <a:schemeClr val="tx1"/>
@@ -419,7 +199,7 @@
         <a:cs typeface="+mn-cs"/>
       </a:defRPr>
     </a:lvl5pPr>
-    <a:lvl6pPr marL="2286000" algn="l" defTabSz="914400" rtl="0" eaLnBrk="1" latinLnBrk="0" hangingPunct="1">
+    <a:lvl6pPr marL="2286000" algn="l" defTabSz="914400" rtl="0" eaLnBrk="1" latinLnBrk="1" hangingPunct="1">
       <a:defRPr sz="1200" kern="1200">
         <a:solidFill>
           <a:schemeClr val="tx1"/>
@@ -429,7 +209,7 @@
         <a:cs typeface="+mn-cs"/>
       </a:defRPr>
     </a:lvl6pPr>
-    <a:lvl7pPr marL="2743200" algn="l" defTabSz="914400" rtl="0" eaLnBrk="1" latinLnBrk="0" hangingPunct="1">
+    <a:lvl7pPr marL="2743200" algn="l" defTabSz="914400" rtl="0" eaLnBrk="1" latinLnBrk="1" hangingPunct="1">
       <a:defRPr sz="1200" kern="1200">
         <a:solidFill>
           <a:schemeClr val="tx1"/>
@@ -439,7 +219,7 @@
         <a:cs typeface="+mn-cs"/>
       </a:defRPr>
     </a:lvl7pPr>
-    <a:lvl8pPr marL="3200400" algn="l" defTabSz="914400" rtl="0" eaLnBrk="1" latinLnBrk="0" hangingPunct="1">
+    <a:lvl8pPr marL="3200400" algn="l" defTabSz="914400" rtl="0" eaLnBrk="1" latinLnBrk="1" hangingPunct="1">
       <a:defRPr sz="1200" kern="1200">
         <a:solidFill>
           <a:schemeClr val="tx1"/>
@@ -449,7 +229,7 @@
         <a:cs typeface="+mn-cs"/>
       </a:defRPr>
     </a:lvl8pPr>
-    <a:lvl9pPr marL="3657600" algn="l" defTabSz="914400" rtl="0" eaLnBrk="1" latinLnBrk="0" hangingPunct="1">
+    <a:lvl9pPr marL="3657600" algn="l" defTabSz="914400" rtl="0" eaLnBrk="1" latinLnBrk="1" hangingPunct="1">
       <a:defRPr sz="1200" kern="1200">
         <a:solidFill>
           <a:schemeClr val="tx1"/>
@@ -507,10 +287,6 @@
           <a:bodyPr/>
           <a:lstStyle/>
           <a:p>
-            <a:r>
-              <a:rPr lang="en-US" dirty="0"/>
-              <a:t/>
-            </a:r>
             <a:endParaRPr lang="en-US" dirty="0"/>
           </a:p>
         </p:txBody>
@@ -595,10 +371,6 @@
           <a:bodyPr/>
           <a:lstStyle/>
           <a:p>
-            <a:r>
-              <a:rPr lang="en-US" dirty="0"/>
-              <a:t/>
-            </a:r>
             <a:endParaRPr lang="en-US" dirty="0"/>
           </a:p>
         </p:txBody>
@@ -683,10 +455,6 @@
           <a:bodyPr/>
           <a:lstStyle/>
           <a:p>
-            <a:r>
-              <a:rPr lang="en-US" dirty="0"/>
-              <a:t/>
-            </a:r>
             <a:endParaRPr lang="en-US" dirty="0"/>
           </a:p>
         </p:txBody>
@@ -771,10 +539,6 @@
           <a:bodyPr/>
           <a:lstStyle/>
           <a:p>
-            <a:r>
-              <a:rPr lang="en-US" dirty="0"/>
-              <a:t/>
-            </a:r>
             <a:endParaRPr lang="en-US" dirty="0"/>
           </a:p>
         </p:txBody>
@@ -859,10 +623,6 @@
           <a:bodyPr/>
           <a:lstStyle/>
           <a:p>
-            <a:r>
-              <a:rPr lang="en-US" dirty="0"/>
-              <a:t/>
-            </a:r>
             <a:endParaRPr lang="en-US" dirty="0"/>
           </a:p>
         </p:txBody>
@@ -947,10 +707,6 @@
           <a:bodyPr/>
           <a:lstStyle/>
           <a:p>
-            <a:r>
-              <a:rPr lang="en-US" dirty="0"/>
-              <a:t/>
-            </a:r>
             <a:endParaRPr lang="en-US" dirty="0"/>
           </a:p>
         </p:txBody>
@@ -1035,10 +791,6 @@
           <a:bodyPr/>
           <a:lstStyle/>
           <a:p>
-            <a:r>
-              <a:rPr lang="en-US" dirty="0"/>
-              <a:t/>
-            </a:r>
             <a:endParaRPr lang="en-US" dirty="0"/>
           </a:p>
         </p:txBody>
@@ -1061,94 +813,6 @@
             <a:fld id="{F7021451-1387-4CA6-816F-3879F97B5CBC}" type="slidenum">
               <a:rPr lang="en-US"/>
               <a:t>7</a:t>
-            </a:fld>
-            <a:endParaRPr lang="en-US"/>
-          </a:p>
-        </p:txBody>
-      </p:sp>
-    </p:spTree>
-    <p:extLst>
-      <p:ext uri="{BB962C8B-B14F-4D97-AF65-F5344CB8AC3E}">
-        <p14:creationId xmlns:p14="http://schemas.microsoft.com/office/powerpoint/2010/main" val="1024086991"/>
-      </p:ext>
-    </p:extLst>
-  </p:cSld>
-  <p:clrMapOvr>
-    <a:masterClrMapping/>
-  </p:clrMapOvr>
-</p:notes>
-</file>
-
-<file path=ppt/notesSlides/notesSlide8.xml><?xml version="1.0" encoding="utf-8"?>
-<p:notes xmlns:a="http://schemas.openxmlformats.org/drawingml/2006/main" xmlns:r="http://schemas.openxmlformats.org/officeDocument/2006/relationships" xmlns:p="http://schemas.openxmlformats.org/presentationml/2006/main">
-  <p:cSld>
-    <p:spTree>
-      <p:nvGrpSpPr>
-        <p:cNvPr id="1" name=""/>
-        <p:cNvGrpSpPr/>
-        <p:nvPr/>
-      </p:nvGrpSpPr>
-      <p:grpSpPr>
-        <a:xfrm>
-          <a:off x="0" y="0"/>
-          <a:ext cx="0" cy="0"/>
-          <a:chOff x="0" y="0"/>
-          <a:chExt cx="0" cy="0"/>
-        </a:xfrm>
-      </p:grpSpPr>
-      <p:sp>
-        <p:nvSpPr>
-          <p:cNvPr id="2" name="Slide Image Placeholder 1"/>
-          <p:cNvSpPr>
-            <a:spLocks noGrp="1" noRot="1" noChangeAspect="1"/>
-          </p:cNvSpPr>
-          <p:nvPr>
-            <p:ph type="sldImg"/>
-          </p:nvPr>
-        </p:nvSpPr>
-        <p:spPr/>
-      </p:sp>
-      <p:sp>
-        <p:nvSpPr>
-          <p:cNvPr id="3" name="Notes Placeholder 2"/>
-          <p:cNvSpPr>
-            <a:spLocks noGrp="1"/>
-          </p:cNvSpPr>
-          <p:nvPr>
-            <p:ph type="body" idx="1"/>
-          </p:nvPr>
-        </p:nvSpPr>
-        <p:spPr/>
-        <p:txBody>
-          <a:bodyPr/>
-          <a:lstStyle/>
-          <a:p>
-            <a:r>
-              <a:rPr lang="en-US" dirty="0"/>
-              <a:t/>
-            </a:r>
-            <a:endParaRPr lang="en-US" dirty="0"/>
-          </a:p>
-        </p:txBody>
-      </p:sp>
-      <p:sp>
-        <p:nvSpPr>
-          <p:cNvPr id="4" name="Slide Number Placeholder 3"/>
-          <p:cNvSpPr>
-            <a:spLocks noGrp="1"/>
-          </p:cNvSpPr>
-          <p:nvPr>
-            <p:ph type="sldNum" sz="quarter" idx="10"/>
-          </p:nvPr>
-        </p:nvSpPr>
-        <p:spPr/>
-        <p:txBody>
-          <a:bodyPr/>
-          <a:lstStyle/>
-          <a:p>
-            <a:fld id="{F7021451-1387-4CA6-816F-3879F97B5CBC}" type="slidenum">
-              <a:rPr lang="en-US"/>
-              <a:t>8</a:t>
             </a:fld>
             <a:endParaRPr lang="en-US"/>
           </a:p>
@@ -1200,6 +864,11 @@
 <file path=ppt/slideMasters/slideMaster1.xml><?xml version="1.0" encoding="utf-8"?>
 <p:sldMaster xmlns:a="http://schemas.openxmlformats.org/drawingml/2006/main" xmlns:r="http://schemas.openxmlformats.org/officeDocument/2006/relationships" xmlns:p="http://schemas.openxmlformats.org/presentationml/2006/main">
   <p:cSld>
+    <p:bg>
+      <p:bgRef idx="1001">
+        <a:schemeClr val="bg1"/>
+      </p:bgRef>
+    </p:bg>
     <p:spTree>
       <p:nvGrpSpPr>
         <p:cNvPr id="1" name=""/>
@@ -1482,6 +1151,7 @@
         <a:solidFill>
           <a:srgbClr val="F2F2F2"/>
         </a:solidFill>
+        <a:effectLst/>
       </p:bgPr>
     </p:bg>
     <p:spTree>
@@ -1519,7 +1189,7 @@
           <a:bodyPr wrap="square" rtlCol="0" anchor="ctr"/>
           <a:lstStyle/>
           <a:p>
-            <a:pPr algn="l" indent="0" marL="0">
+            <a:pPr marL="0" indent="0" algn="l">
               <a:buNone/>
             </a:pPr>
             <a:r>
@@ -1558,7 +1228,7 @@
           <a:bodyPr wrap="square" rtlCol="0" anchor="ctr"/>
           <a:lstStyle/>
           <a:p>
-            <a:pPr algn="l" indent="0" marL="0">
+            <a:pPr marL="0" indent="0" algn="l">
               <a:buNone/>
             </a:pPr>
             <a:r>
@@ -1597,7 +1267,7 @@
           <a:bodyPr wrap="square" rtlCol="0" anchor="ctr"/>
           <a:lstStyle/>
           <a:p>
-            <a:pPr algn="r" indent="0" marL="0">
+            <a:pPr marL="0" indent="0" algn="r">
               <a:buNone/>
             </a:pPr>
             <a:r>
@@ -1661,7 +1331,7 @@
           <a:bodyPr wrap="square" lIns="0" tIns="0" rIns="0" bIns="0" rtlCol="0" anchor="ctr"/>
           <a:lstStyle/>
           <a:p>
-            <a:pPr indent="0" marL="0">
+            <a:pPr marL="0" indent="0">
               <a:buNone/>
             </a:pPr>
             <a:r>
@@ -1806,7 +1476,7 @@
           <a:bodyPr wrap="square" rtlCol="0" anchor="ctr"/>
           <a:lstStyle/>
           <a:p>
-            <a:pPr algn="r" indent="0" marL="0">
+            <a:pPr marL="0" indent="0" algn="r">
               <a:buNone/>
             </a:pPr>
             <a:r>
@@ -1870,7 +1540,7 @@
           <a:bodyPr wrap="square" lIns="0" tIns="0" rIns="0" bIns="0" rtlCol="0" anchor="ctr"/>
           <a:lstStyle/>
           <a:p>
-            <a:pPr indent="0" marL="0">
+            <a:pPr marL="0" indent="0">
               <a:buNone/>
             </a:pPr>
             <a:r>
@@ -1972,15 +1642,69 @@
             <a:tbl>
               <a:tblPr/>
               <a:tblGrid>
-                <a:gridCol w="894080"/>
-                <a:gridCol w="894080"/>
-                <a:gridCol w="894080"/>
-                <a:gridCol w="894080"/>
-                <a:gridCol w="894080"/>
-                <a:gridCol w="894080"/>
-                <a:gridCol w="894080"/>
-                <a:gridCol w="894080"/>
-                <a:gridCol w="894080"/>
+                <a:gridCol w="894080">
+                  <a:extLst>
+                    <a:ext uri="{9D8B030D-6E8A-4147-A177-3AD203B41FA5}">
+                      <a16:colId xmlns:a16="http://schemas.microsoft.com/office/drawing/2014/main" val="20000"/>
+                    </a:ext>
+                  </a:extLst>
+                </a:gridCol>
+                <a:gridCol w="894080">
+                  <a:extLst>
+                    <a:ext uri="{9D8B030D-6E8A-4147-A177-3AD203B41FA5}">
+                      <a16:colId xmlns:a16="http://schemas.microsoft.com/office/drawing/2014/main" val="20001"/>
+                    </a:ext>
+                  </a:extLst>
+                </a:gridCol>
+                <a:gridCol w="894080">
+                  <a:extLst>
+                    <a:ext uri="{9D8B030D-6E8A-4147-A177-3AD203B41FA5}">
+                      <a16:colId xmlns:a16="http://schemas.microsoft.com/office/drawing/2014/main" val="20002"/>
+                    </a:ext>
+                  </a:extLst>
+                </a:gridCol>
+                <a:gridCol w="894080">
+                  <a:extLst>
+                    <a:ext uri="{9D8B030D-6E8A-4147-A177-3AD203B41FA5}">
+                      <a16:colId xmlns:a16="http://schemas.microsoft.com/office/drawing/2014/main" val="20003"/>
+                    </a:ext>
+                  </a:extLst>
+                </a:gridCol>
+                <a:gridCol w="894080">
+                  <a:extLst>
+                    <a:ext uri="{9D8B030D-6E8A-4147-A177-3AD203B41FA5}">
+                      <a16:colId xmlns:a16="http://schemas.microsoft.com/office/drawing/2014/main" val="20004"/>
+                    </a:ext>
+                  </a:extLst>
+                </a:gridCol>
+                <a:gridCol w="894080">
+                  <a:extLst>
+                    <a:ext uri="{9D8B030D-6E8A-4147-A177-3AD203B41FA5}">
+                      <a16:colId xmlns:a16="http://schemas.microsoft.com/office/drawing/2014/main" val="20005"/>
+                    </a:ext>
+                  </a:extLst>
+                </a:gridCol>
+                <a:gridCol w="894080">
+                  <a:extLst>
+                    <a:ext uri="{9D8B030D-6E8A-4147-A177-3AD203B41FA5}">
+                      <a16:colId xmlns:a16="http://schemas.microsoft.com/office/drawing/2014/main" val="20006"/>
+                    </a:ext>
+                  </a:extLst>
+                </a:gridCol>
+                <a:gridCol w="894080">
+                  <a:extLst>
+                    <a:ext uri="{9D8B030D-6E8A-4147-A177-3AD203B41FA5}">
+                      <a16:colId xmlns:a16="http://schemas.microsoft.com/office/drawing/2014/main" val="20007"/>
+                    </a:ext>
+                  </a:extLst>
+                </a:gridCol>
+                <a:gridCol w="894080">
+                  <a:extLst>
+                    <a:ext uri="{9D8B030D-6E8A-4147-A177-3AD203B41FA5}">
+                      <a16:colId xmlns:a16="http://schemas.microsoft.com/office/drawing/2014/main" val="20008"/>
+                    </a:ext>
+                  </a:extLst>
+                </a:gridCol>
               </a:tblGrid>
               <a:tr h="457200">
                 <a:tc>
@@ -1988,7 +1712,7 @@
                     <a:bodyPr/>
                     <a:lstStyle/>
                     <a:p>
-                      <a:pPr algn="ctr" indent="0" marL="0">
+                      <a:pPr marL="0" indent="0" algn="ctr">
                         <a:buNone/>
                       </a:pPr>
                       <a:r>
@@ -2009,7 +1733,7 @@
                       </a:endParaRPr>
                     </a:p>
                   </a:txBody>
-                  <a:tcPr marL="91440" marR="91440" marT="45720" marB="45720">
+                  <a:tcPr>
                     <a:lnL w="6350" cap="flat" cmpd="sng" algn="ctr">
                       <a:solidFill>
                         <a:srgbClr val="CCCCCC"/>
@@ -2056,7 +1780,7 @@
                     <a:bodyPr/>
                     <a:lstStyle/>
                     <a:p>
-                      <a:pPr algn="ctr" indent="0" marL="0">
+                      <a:pPr marL="0" indent="0" algn="ctr">
                         <a:buNone/>
                       </a:pPr>
                       <a:r>
@@ -2077,7 +1801,7 @@
                       </a:endParaRPr>
                     </a:p>
                   </a:txBody>
-                  <a:tcPr marL="91440" marR="91440" marT="45720" marB="45720">
+                  <a:tcPr>
                     <a:lnL w="6350" cap="flat" cmpd="sng" algn="ctr">
                       <a:solidFill>
                         <a:srgbClr val="CCCCCC"/>
@@ -2124,7 +1848,7 @@
                     <a:bodyPr/>
                     <a:lstStyle/>
                     <a:p>
-                      <a:pPr algn="ctr" indent="0" marL="0">
+                      <a:pPr marL="0" indent="0" algn="ctr">
                         <a:buNone/>
                       </a:pPr>
                       <a:r>
@@ -2145,7 +1869,7 @@
                       </a:endParaRPr>
                     </a:p>
                   </a:txBody>
-                  <a:tcPr marL="91440" marR="91440" marT="45720" marB="45720">
+                  <a:tcPr>
                     <a:lnL w="6350" cap="flat" cmpd="sng" algn="ctr">
                       <a:solidFill>
                         <a:srgbClr val="CCCCCC"/>
@@ -2192,7 +1916,7 @@
                     <a:bodyPr/>
                     <a:lstStyle/>
                     <a:p>
-                      <a:pPr algn="ctr" indent="0" marL="0">
+                      <a:pPr marL="0" indent="0" algn="ctr">
                         <a:buNone/>
                       </a:pPr>
                       <a:r>
@@ -2213,7 +1937,7 @@
                       </a:endParaRPr>
                     </a:p>
                   </a:txBody>
-                  <a:tcPr marL="91440" marR="91440" marT="45720" marB="45720">
+                  <a:tcPr>
                     <a:lnL w="6350" cap="flat" cmpd="sng" algn="ctr">
                       <a:solidFill>
                         <a:srgbClr val="CCCCCC"/>
@@ -2260,7 +1984,7 @@
                     <a:bodyPr/>
                     <a:lstStyle/>
                     <a:p>
-                      <a:pPr algn="ctr" indent="0" marL="0">
+                      <a:pPr marL="0" indent="0" algn="ctr">
                         <a:buNone/>
                       </a:pPr>
                       <a:r>
@@ -2281,7 +2005,7 @@
                       </a:endParaRPr>
                     </a:p>
                   </a:txBody>
-                  <a:tcPr marL="91440" marR="91440" marT="45720" marB="45720">
+                  <a:tcPr>
                     <a:lnL w="6350" cap="flat" cmpd="sng" algn="ctr">
                       <a:solidFill>
                         <a:srgbClr val="CCCCCC"/>
@@ -2328,7 +2052,7 @@
                     <a:bodyPr/>
                     <a:lstStyle/>
                     <a:p>
-                      <a:pPr algn="ctr" indent="0" marL="0">
+                      <a:pPr marL="0" indent="0" algn="ctr">
                         <a:buNone/>
                       </a:pPr>
                       <a:r>
@@ -2349,7 +2073,7 @@
                       </a:endParaRPr>
                     </a:p>
                   </a:txBody>
-                  <a:tcPr marL="91440" marR="91440" marT="45720" marB="45720">
+                  <a:tcPr>
                     <a:lnL w="6350" cap="flat" cmpd="sng" algn="ctr">
                       <a:solidFill>
                         <a:srgbClr val="CCCCCC"/>
@@ -2396,7 +2120,7 @@
                     <a:bodyPr/>
                     <a:lstStyle/>
                     <a:p>
-                      <a:pPr algn="ctr" indent="0" marL="0">
+                      <a:pPr marL="0" indent="0" algn="ctr">
                         <a:buNone/>
                       </a:pPr>
                       <a:r>
@@ -2417,7 +2141,7 @@
                       </a:endParaRPr>
                     </a:p>
                   </a:txBody>
-                  <a:tcPr marL="91440" marR="91440" marT="45720" marB="45720">
+                  <a:tcPr>
                     <a:lnL w="6350" cap="flat" cmpd="sng" algn="ctr">
                       <a:solidFill>
                         <a:srgbClr val="CCCCCC"/>
@@ -2464,7 +2188,7 @@
                     <a:bodyPr/>
                     <a:lstStyle/>
                     <a:p>
-                      <a:pPr algn="ctr" indent="0" marL="0">
+                      <a:pPr marL="0" indent="0" algn="ctr">
                         <a:buNone/>
                       </a:pPr>
                       <a:r>
@@ -2485,7 +2209,7 @@
                       </a:endParaRPr>
                     </a:p>
                   </a:txBody>
-                  <a:tcPr marL="91440" marR="91440" marT="45720" marB="45720">
+                  <a:tcPr>
                     <a:lnL w="6350" cap="flat" cmpd="sng" algn="ctr">
                       <a:solidFill>
                         <a:srgbClr val="CCCCCC"/>
@@ -2532,7 +2256,7 @@
                     <a:bodyPr/>
                     <a:lstStyle/>
                     <a:p>
-                      <a:pPr algn="ctr" indent="0" marL="0">
+                      <a:pPr marL="0" indent="0" algn="ctr">
                         <a:buNone/>
                       </a:pPr>
                       <a:r>
@@ -2553,7 +2277,7 @@
                       </a:endParaRPr>
                     </a:p>
                   </a:txBody>
-                  <a:tcPr marL="91440" marR="91440" marT="45720" marB="45720">
+                  <a:tcPr>
                     <a:lnL w="6350" cap="flat" cmpd="sng" algn="ctr">
                       <a:solidFill>
                         <a:srgbClr val="CCCCCC"/>
@@ -2595,6 +2319,11 @@
                     </a:solidFill>
                   </a:tcPr>
                 </a:tc>
+                <a:extLst>
+                  <a:ext uri="{0D108BD9-81ED-4DB2-BD59-A6C34878D82A}">
+                    <a16:rowId xmlns:a16="http://schemas.microsoft.com/office/drawing/2014/main" val="10000"/>
+                  </a:ext>
+                </a:extLst>
               </a:tr>
               <a:tr h="457200">
                 <a:tc>
@@ -2602,7 +2331,7 @@
                     <a:bodyPr/>
                     <a:lstStyle/>
                     <a:p>
-                      <a:pPr algn="ctr" indent="0" marL="0">
+                      <a:pPr marL="0" indent="0" algn="ctr">
                         <a:buNone/>
                       </a:pPr>
                       <a:r>
@@ -2623,7 +2352,7 @@
                       </a:endParaRPr>
                     </a:p>
                   </a:txBody>
-                  <a:tcPr marL="91440" marR="91440" marT="45720" marB="45720">
+                  <a:tcPr>
                     <a:lnL w="6350" cap="flat" cmpd="sng" algn="ctr">
                       <a:solidFill>
                         <a:srgbClr val="CCCCCC"/>
@@ -2667,7 +2396,7 @@
                     <a:bodyPr/>
                     <a:lstStyle/>
                     <a:p>
-                      <a:pPr algn="ctr" indent="0" marL="0">
+                      <a:pPr marL="0" indent="0" algn="ctr">
                         <a:buNone/>
                       </a:pPr>
                       <a:r>
@@ -2688,7 +2417,7 @@
                       </a:endParaRPr>
                     </a:p>
                   </a:txBody>
-                  <a:tcPr marL="91440" marR="91440" marT="45720" marB="45720">
+                  <a:tcPr>
                     <a:lnL w="6350" cap="flat" cmpd="sng" algn="ctr">
                       <a:solidFill>
                         <a:srgbClr val="CCCCCC"/>
@@ -2732,7 +2461,7 @@
                     <a:bodyPr/>
                     <a:lstStyle/>
                     <a:p>
-                      <a:pPr algn="ctr" indent="0" marL="0">
+                      <a:pPr marL="0" indent="0" algn="ctr">
                         <a:buNone/>
                       </a:pPr>
                       <a:r>
@@ -2753,7 +2482,7 @@
                       </a:endParaRPr>
                     </a:p>
                   </a:txBody>
-                  <a:tcPr marL="91440" marR="91440" marT="45720" marB="45720">
+                  <a:tcPr>
                     <a:lnL w="6350" cap="flat" cmpd="sng" algn="ctr">
                       <a:solidFill>
                         <a:srgbClr val="CCCCCC"/>
@@ -2797,7 +2526,7 @@
                     <a:bodyPr/>
                     <a:lstStyle/>
                     <a:p>
-                      <a:pPr algn="ctr" indent="0" marL="0">
+                      <a:pPr marL="0" indent="0" algn="ctr">
                         <a:buNone/>
                       </a:pPr>
                       <a:r>
@@ -2818,7 +2547,7 @@
                       </a:endParaRPr>
                     </a:p>
                   </a:txBody>
-                  <a:tcPr marL="91440" marR="91440" marT="45720" marB="45720">
+                  <a:tcPr>
                     <a:lnL w="6350" cap="flat" cmpd="sng" algn="ctr">
                       <a:solidFill>
                         <a:srgbClr val="CCCCCC"/>
@@ -2862,7 +2591,7 @@
                     <a:bodyPr/>
                     <a:lstStyle/>
                     <a:p>
-                      <a:pPr algn="ctr" indent="0" marL="0">
+                      <a:pPr marL="0" indent="0" algn="ctr">
                         <a:buNone/>
                       </a:pPr>
                       <a:r>
@@ -2883,7 +2612,7 @@
                       </a:endParaRPr>
                     </a:p>
                   </a:txBody>
-                  <a:tcPr marL="91440" marR="91440" marT="45720" marB="45720">
+                  <a:tcPr>
                     <a:lnL w="6350" cap="flat" cmpd="sng" algn="ctr">
                       <a:solidFill>
                         <a:srgbClr val="CCCCCC"/>
@@ -2927,7 +2656,7 @@
                     <a:bodyPr/>
                     <a:lstStyle/>
                     <a:p>
-                      <a:pPr algn="ctr" indent="0" marL="0">
+                      <a:pPr marL="0" indent="0" algn="ctr">
                         <a:buNone/>
                       </a:pPr>
                       <a:r>
@@ -2948,7 +2677,7 @@
                       </a:endParaRPr>
                     </a:p>
                   </a:txBody>
-                  <a:tcPr marL="91440" marR="91440" marT="45720" marB="45720">
+                  <a:tcPr>
                     <a:lnL w="6350" cap="flat" cmpd="sng" algn="ctr">
                       <a:solidFill>
                         <a:srgbClr val="CCCCCC"/>
@@ -2992,7 +2721,7 @@
                     <a:bodyPr/>
                     <a:lstStyle/>
                     <a:p>
-                      <a:pPr algn="ctr" indent="0" marL="0">
+                      <a:pPr marL="0" indent="0" algn="ctr">
                         <a:buNone/>
                       </a:pPr>
                       <a:r>
@@ -3013,7 +2742,7 @@
                       </a:endParaRPr>
                     </a:p>
                   </a:txBody>
-                  <a:tcPr marL="91440" marR="91440" marT="45720" marB="45720">
+                  <a:tcPr>
                     <a:lnL w="6350" cap="flat" cmpd="sng" algn="ctr">
                       <a:solidFill>
                         <a:srgbClr val="CCCCCC"/>
@@ -3057,7 +2786,7 @@
                     <a:bodyPr/>
                     <a:lstStyle/>
                     <a:p>
-                      <a:pPr algn="ctr" indent="0" marL="0">
+                      <a:pPr marL="0" indent="0" algn="ctr">
                         <a:buNone/>
                       </a:pPr>
                       <a:r>
@@ -3078,7 +2807,7 @@
                       </a:endParaRPr>
                     </a:p>
                   </a:txBody>
-                  <a:tcPr marL="91440" marR="91440" marT="45720" marB="45720">
+                  <a:tcPr>
                     <a:lnL w="6350" cap="flat" cmpd="sng" algn="ctr">
                       <a:solidFill>
                         <a:srgbClr val="CCCCCC"/>
@@ -3122,7 +2851,7 @@
                     <a:bodyPr/>
                     <a:lstStyle/>
                     <a:p>
-                      <a:pPr algn="ctr" indent="0" marL="0">
+                      <a:pPr marL="0" indent="0" algn="ctr">
                         <a:buNone/>
                       </a:pPr>
                       <a:r>
@@ -3143,7 +2872,7 @@
                       </a:endParaRPr>
                     </a:p>
                   </a:txBody>
-                  <a:tcPr marL="91440" marR="91440" marT="45720" marB="45720">
+                  <a:tcPr>
                     <a:lnL w="6350" cap="flat" cmpd="sng" algn="ctr">
                       <a:solidFill>
                         <a:srgbClr val="CCCCCC"/>
@@ -3182,6 +2911,11 @@
                     </a:lnB>
                   </a:tcPr>
                 </a:tc>
+                <a:extLst>
+                  <a:ext uri="{0D108BD9-81ED-4DB2-BD59-A6C34878D82A}">
+                    <a16:rowId xmlns:a16="http://schemas.microsoft.com/office/drawing/2014/main" val="10001"/>
+                  </a:ext>
+                </a:extLst>
               </a:tr>
             </a:tbl>
           </a:graphicData>
@@ -3208,7 +2942,7 @@
           <a:bodyPr wrap="square" rtlCol="0" anchor="ctr"/>
           <a:lstStyle/>
           <a:p>
-            <a:pPr algn="r" indent="0" marL="0">
+            <a:pPr marL="0" indent="0" algn="r">
               <a:buNone/>
             </a:pPr>
             <a:r>
@@ -3272,7 +3006,7 @@
           <a:bodyPr wrap="square" lIns="0" tIns="0" rIns="0" bIns="0" rtlCol="0" anchor="ctr"/>
           <a:lstStyle/>
           <a:p>
-            <a:pPr indent="0" marL="0">
+            <a:pPr marL="0" indent="0">
               <a:buNone/>
             </a:pPr>
             <a:r>
@@ -3417,7 +3151,7 @@
           <a:bodyPr wrap="square" rtlCol="0" anchor="ctr"/>
           <a:lstStyle/>
           <a:p>
-            <a:pPr algn="r" indent="0" marL="0">
+            <a:pPr marL="0" indent="0" algn="r">
               <a:buNone/>
             </a:pPr>
             <a:r>
@@ -3481,7 +3215,7 @@
           <a:bodyPr wrap="square" lIns="0" tIns="0" rIns="0" bIns="0" rtlCol="0" anchor="ctr"/>
           <a:lstStyle/>
           <a:p>
-            <a:pPr indent="0" marL="0">
+            <a:pPr marL="0" indent="0">
               <a:buNone/>
             </a:pPr>
             <a:r>
@@ -3626,7 +3360,7 @@
           <a:bodyPr wrap="square" rtlCol="0" anchor="ctr"/>
           <a:lstStyle/>
           <a:p>
-            <a:pPr algn="r" indent="0" marL="0">
+            <a:pPr marL="0" indent="0" algn="r">
               <a:buNone/>
             </a:pPr>
             <a:r>
@@ -3690,7 +3424,7 @@
           <a:bodyPr wrap="square" lIns="0" tIns="0" rIns="0" bIns="0" rtlCol="0" anchor="ctr"/>
           <a:lstStyle/>
           <a:p>
-            <a:pPr indent="0" marL="0">
+            <a:pPr marL="0" indent="0">
               <a:buNone/>
             </a:pPr>
             <a:r>
@@ -3816,20 +3550,20 @@
       </p:sp>
       <p:pic>
         <p:nvPicPr>
-          <p:cNvPr id="4" name="Image 0" descr="/home/user/SoC_Design_and_Programming/diagrams/section3/zoom/master_fault_flow.png">    </p:cNvPr>
+          <p:cNvPr id="4" name="Image 0" descr="/home/user/SoC_Design_and_Programming/diagrams/section3/zoom/master_fault_flow.png"/>
           <p:cNvPicPr>
             <a:picLocks noChangeAspect="1"/>
           </p:cNvPicPr>
           <p:nvPr/>
         </p:nvPicPr>
         <p:blipFill>
-          <a:blip r:embed="rId1"/>
-          <a:srcRect l="0" r="0" t="0" b="0"/>
+          <a:blip r:embed="rId3"/>
+          <a:srcRect/>
           <a:stretch/>
         </p:blipFill>
         <p:spPr>
           <a:xfrm>
-            <a:off x="548640" y="2404499"/>
+            <a:off x="548640" y="2722178"/>
             <a:ext cx="8046720" cy="1683242"/>
           </a:xfrm>
           <a:prstGeom prst="rect">
@@ -3858,7 +3592,7 @@
           <a:bodyPr wrap="square" rtlCol="0" anchor="ctr"/>
           <a:lstStyle/>
           <a:p>
-            <a:pPr algn="r" indent="0" marL="0">
+            <a:pPr marL="0" indent="0" algn="r">
               <a:buNone/>
             </a:pPr>
             <a:r>
@@ -3922,7 +3656,7 @@
           <a:bodyPr wrap="square" lIns="0" tIns="0" rIns="0" bIns="0" rtlCol="0" anchor="ctr"/>
           <a:lstStyle/>
           <a:p>
-            <a:pPr indent="0" marL="0">
+            <a:pPr marL="0" indent="0">
               <a:buNone/>
             </a:pPr>
             <a:r>
@@ -4046,7 +3780,7 @@
           <a:bodyPr wrap="square" rtlCol="0" anchor="ctr"/>
           <a:lstStyle/>
           <a:p>
-            <a:pPr algn="r" indent="0" marL="0">
+            <a:pPr marL="0" indent="0" algn="r">
               <a:buNone/>
             </a:pPr>
             <a:r>
@@ -4059,238 +3793,6 @@
                 <a:cs typeface="Noto Sans CJK KR" pitchFamily="34" charset="-120"/>
               </a:rPr>
               <a:t>7</a:t>
-            </a:r>
-            <a:endParaRPr lang="en-US" sz="1200" dirty="0"/>
-          </a:p>
-        </p:txBody>
-      </p:sp>
-    </p:spTree>
-  </p:cSld>
-  <p:clrMapOvr>
-    <a:masterClrMapping/>
-  </p:clrMapOvr>
-</p:sld>
-</file>
-
-<file path=ppt/slides/slide8.xml><?xml version="1.0" encoding="utf-8"?>
-<p:sld xmlns:a="http://schemas.openxmlformats.org/drawingml/2006/main" xmlns:r="http://schemas.openxmlformats.org/officeDocument/2006/relationships" xmlns:p="http://schemas.openxmlformats.org/presentationml/2006/main">
-  <p:cSld name="Slide 8">
-    <p:spTree>
-      <p:nvGrpSpPr>
-        <p:cNvPr id="1" name=""/>
-        <p:cNvGrpSpPr/>
-        <p:nvPr/>
-      </p:nvGrpSpPr>
-      <p:grpSpPr>
-        <a:xfrm>
-          <a:off x="0" y="0"/>
-          <a:ext cx="0" cy="0"/>
-          <a:chOff x="0" y="0"/>
-          <a:chExt cx="0" cy="0"/>
-        </a:xfrm>
-      </p:grpSpPr>
-      <p:sp>
-        <p:nvSpPr>
-          <p:cNvPr id="2" name="Text 0"/>
-          <p:cNvSpPr/>
-          <p:nvPr/>
-        </p:nvSpPr>
-        <p:spPr>
-          <a:xfrm>
-            <a:off x="548640" y="274320"/>
-            <a:ext cx="8046720" cy="777240"/>
-          </a:xfrm>
-          <a:prstGeom prst="rect">
-            <a:avLst/>
-          </a:prstGeom>
-          <a:noFill/>
-          <a:ln/>
-        </p:spPr>
-        <p:txBody>
-          <a:bodyPr wrap="square" lIns="0" tIns="0" rIns="0" bIns="0" rtlCol="0" anchor="ctr"/>
-          <a:lstStyle/>
-          <a:p>
-            <a:pPr indent="0" marL="0">
-              <a:buNone/>
-            </a:pPr>
-            <a:r>
-              <a:rPr lang="en-US" sz="3600" b="1" dirty="0">
-                <a:solidFill>
-                  <a:srgbClr val="111111"/>
-                </a:solidFill>
-                <a:latin typeface="Noto Sans CJK KR" pitchFamily="34" charset="0"/>
-                <a:ea typeface="Noto Sans CJK KR" pitchFamily="34" charset="-122"/>
-                <a:cs typeface="Noto Sans CJK KR" pitchFamily="34" charset="-120"/>
-              </a:rPr>
-              <a:t>Slave halt 흐름도</a:t>
-            </a:r>
-            <a:endParaRPr lang="en-US" sz="3600" dirty="0"/>
-          </a:p>
-        </p:txBody>
-      </p:sp>
-      <p:sp>
-        <p:nvSpPr>
-          <p:cNvPr id="3" name="Text 1"/>
-          <p:cNvSpPr/>
-          <p:nvPr/>
-        </p:nvSpPr>
-        <p:spPr>
-          <a:xfrm>
-            <a:off x="548640" y="1188720"/>
-            <a:ext cx="8046720" cy="685800"/>
-          </a:xfrm>
-          <a:prstGeom prst="rect">
-            <a:avLst/>
-          </a:prstGeom>
-          <a:noFill/>
-          <a:ln/>
-        </p:spPr>
-        <p:txBody>
-          <a:bodyPr wrap="square" rtlCol="0" anchor="t"/>
-          <a:lstStyle/>
-          <a:p>
-            <a:pPr marL="342900" indent="-342900">
-              <a:spcAft>
-                <a:spcPts val="600"/>
-              </a:spcAft>
-              <a:buSzPct val="100000"/>
-              <a:buChar char="•"/>
-            </a:pPr>
-            <a:r>
-              <a:rPr lang="en-US" sz="1600" dirty="0">
-                <a:solidFill>
-                  <a:srgbClr val="222222"/>
-                </a:solidFill>
-                <a:latin typeface="Noto Sans CJK KR" pitchFamily="34" charset="0"/>
-                <a:ea typeface="Noto Sans CJK KR" pitchFamily="34" charset="-122"/>
-                <a:cs typeface="Noto Sans CJK KR" pitchFamily="34" charset="-120"/>
-              </a:rPr>
-              <a:t>Master broadcast에서 halt_mask 추출</a:t>
-            </a:r>
-            <a:endParaRPr lang="en-US" sz="1600" dirty="0"/>
-          </a:p>
-          <a:p>
-            <a:pPr marL="342900" indent="-342900">
-              <a:spcAft>
-                <a:spcPts val="600"/>
-              </a:spcAft>
-              <a:buSzPct val="100000"/>
-              <a:buChar char="•"/>
-            </a:pPr>
-            <a:r>
-              <a:rPr lang="en-US" sz="1600" dirty="0">
-                <a:solidFill>
-                  <a:srgbClr val="222222"/>
-                </a:solidFill>
-                <a:latin typeface="Noto Sans CJK KR" pitchFamily="34" charset="0"/>
-                <a:ea typeface="Noto Sans CJK KR" pitchFamily="34" charset="-122"/>
-                <a:cs typeface="Noto Sans CJK KR" pitchFamily="34" charset="-120"/>
-              </a:rPr>
-              <a:t>슬롯 시퀀서가 active_slot에서 halt된 슬롯을 제외</a:t>
-            </a:r>
-            <a:endParaRPr lang="en-US" sz="1600" dirty="0"/>
-          </a:p>
-          <a:p>
-            <a:pPr marL="342900" indent="-342900">
-              <a:spcAft>
-                <a:spcPts val="600"/>
-              </a:spcAft>
-              <a:buSzPct val="100000"/>
-              <a:buChar char="•"/>
-            </a:pPr>
-            <a:r>
-              <a:rPr lang="en-US" sz="1600" dirty="0">
-                <a:solidFill>
-                  <a:srgbClr val="222222"/>
-                </a:solidFill>
-                <a:latin typeface="Noto Sans CJK KR" pitchFamily="34" charset="0"/>
-                <a:ea typeface="Noto Sans CJK KR" pitchFamily="34" charset="-122"/>
-                <a:cs typeface="Noto Sans CJK KR" pitchFamily="34" charset="-120"/>
-              </a:rPr>
-              <a:t>해당 슬롯은 TX를 발행하지 않음</a:t>
-            </a:r>
-            <a:endParaRPr lang="en-US" sz="1600" dirty="0"/>
-          </a:p>
-          <a:p>
-            <a:pPr marL="342900" indent="-342900">
-              <a:spcAft>
-                <a:spcPts val="600"/>
-              </a:spcAft>
-              <a:buSzPct val="100000"/>
-              <a:buChar char="•"/>
-            </a:pPr>
-            <a:r>
-              <a:rPr lang="en-US" sz="1600" dirty="0">
-                <a:solidFill>
-                  <a:srgbClr val="222222"/>
-                </a:solidFill>
-                <a:latin typeface="Noto Sans CJK KR" pitchFamily="34" charset="0"/>
-                <a:ea typeface="Noto Sans CJK KR" pitchFamily="34" charset="-122"/>
-                <a:cs typeface="Noto Sans CJK KR" pitchFamily="34" charset="-120"/>
-              </a:rPr>
-              <a:t>Master가 비트를 다시 0으로 보내면 자동 재개</a:t>
-            </a:r>
-            <a:endParaRPr lang="en-US" sz="1600" dirty="0"/>
-          </a:p>
-        </p:txBody>
-      </p:sp>
-      <p:pic>
-        <p:nvPicPr>
-          <p:cNvPr id="4" name="Image 0" descr="/home/user/SoC_Design_and_Programming/diagrams/section3/zoom/slave_halt_flow.png">    </p:cNvPr>
-          <p:cNvPicPr>
-            <a:picLocks noChangeAspect="1"/>
-          </p:cNvPicPr>
-          <p:nvPr/>
-        </p:nvPicPr>
-        <p:blipFill>
-          <a:blip r:embed="rId1"/>
-          <a:srcRect l="0" r="0" t="0" b="0"/>
-          <a:stretch/>
-        </p:blipFill>
-        <p:spPr>
-          <a:xfrm>
-            <a:off x="548640" y="2291598"/>
-            <a:ext cx="8046720" cy="1909043"/>
-          </a:xfrm>
-          <a:prstGeom prst="rect">
-            <a:avLst/>
-          </a:prstGeom>
-        </p:spPr>
-      </p:pic>
-      <p:sp>
-        <p:nvSpPr>
-          <p:cNvPr id="5" name="Text 2"/>
-          <p:cNvSpPr/>
-          <p:nvPr/>
-        </p:nvSpPr>
-        <p:spPr>
-          <a:xfrm>
-            <a:off x="8503920" y="4754880"/>
-            <a:ext cx="457200" cy="274320"/>
-          </a:xfrm>
-          <a:prstGeom prst="rect">
-            <a:avLst/>
-          </a:prstGeom>
-          <a:noFill/>
-          <a:ln/>
-        </p:spPr>
-        <p:txBody>
-          <a:bodyPr wrap="square" rtlCol="0" anchor="ctr"/>
-          <a:lstStyle/>
-          <a:p>
-            <a:pPr algn="r" indent="0" marL="0">
-              <a:buNone/>
-            </a:pPr>
-            <a:r>
-              <a:rPr lang="en-US" sz="1200" dirty="0">
-                <a:solidFill>
-                  <a:srgbClr val="999999"/>
-                </a:solidFill>
-                <a:latin typeface="Noto Sans CJK KR" pitchFamily="34" charset="0"/>
-                <a:ea typeface="Noto Sans CJK KR" pitchFamily="34" charset="-122"/>
-                <a:cs typeface="Noto Sans CJK KR" pitchFamily="34" charset="-120"/>
-              </a:rPr>
-              <a:t>8</a:t>
             </a:r>
             <a:endParaRPr lang="en-US" sz="1200" dirty="0"/>
           </a:p>
@@ -4597,4 +4099,319 @@
     </a:ext>
   </a:extLst>
 </a:theme>
+</file>
+
+<file path=ppt/theme/theme2.xml><?xml version="1.0" encoding="utf-8"?>
+<a:theme xmlns:a="http://schemas.openxmlformats.org/drawingml/2006/main" name="Office 테마">
+  <a:themeElements>
+    <a:clrScheme name="Office">
+      <a:dk1>
+        <a:sysClr val="windowText" lastClr="000000"/>
+      </a:dk1>
+      <a:lt1>
+        <a:sysClr val="window" lastClr="FFFFFF"/>
+      </a:lt1>
+      <a:dk2>
+        <a:srgbClr val="0E2841"/>
+      </a:dk2>
+      <a:lt2>
+        <a:srgbClr val="E8E8E8"/>
+      </a:lt2>
+      <a:accent1>
+        <a:srgbClr val="156082"/>
+      </a:accent1>
+      <a:accent2>
+        <a:srgbClr val="E97132"/>
+      </a:accent2>
+      <a:accent3>
+        <a:srgbClr val="196B24"/>
+      </a:accent3>
+      <a:accent4>
+        <a:srgbClr val="0F9ED5"/>
+      </a:accent4>
+      <a:accent5>
+        <a:srgbClr val="A02B93"/>
+      </a:accent5>
+      <a:accent6>
+        <a:srgbClr val="4EA72E"/>
+      </a:accent6>
+      <a:hlink>
+        <a:srgbClr val="467886"/>
+      </a:hlink>
+      <a:folHlink>
+        <a:srgbClr val="96607D"/>
+      </a:folHlink>
+    </a:clrScheme>
+    <a:fontScheme name="Office">
+      <a:majorFont>
+        <a:latin typeface="맑은 고딕" panose="02110004020202020204"/>
+        <a:ea typeface=""/>
+        <a:cs typeface=""/>
+        <a:font script="Jpan" typeface="游ゴシック Light"/>
+        <a:font script="Hang" typeface="맑은 고딕"/>
+        <a:font script="Hans" typeface="等线 Light"/>
+        <a:font script="Hant" typeface="新細明體"/>
+        <a:font script="Arab" typeface="Times New Roman"/>
+        <a:font script="Hebr" typeface="Times New Roman"/>
+        <a:font script="Thai" typeface="Angsana New"/>
+        <a:font script="Ethi" typeface="Nyala"/>
+        <a:font script="Beng" typeface="Vrinda"/>
+        <a:font script="Gujr" typeface="Shruti"/>
+        <a:font script="Khmr" typeface="MoolBoran"/>
+        <a:font script="Knda" typeface="Tunga"/>
+        <a:font script="Guru" typeface="Raavi"/>
+        <a:font script="Cans" typeface="Euphemia"/>
+        <a:font script="Cher" typeface="Plantagenet Cherokee"/>
+        <a:font script="Yiii" typeface="Microsoft Yi Baiti"/>
+        <a:font script="Tibt" typeface="Microsoft Himalaya"/>
+        <a:font script="Thaa" typeface="MV Boli"/>
+        <a:font script="Deva" typeface="Mangal"/>
+        <a:font script="Telu" typeface="Gautami"/>
+        <a:font script="Taml" typeface="Latha"/>
+        <a:font script="Syrc" typeface="Estrangelo Edessa"/>
+        <a:font script="Orya" typeface="Kalinga"/>
+        <a:font script="Mlym" typeface="Kartika"/>
+        <a:font script="Laoo" typeface="DokChampa"/>
+        <a:font script="Sinh" typeface="Iskoola Pota"/>
+        <a:font script="Mong" typeface="Mongolian Baiti"/>
+        <a:font script="Viet" typeface="Times New Roman"/>
+        <a:font script="Uigh" typeface="Microsoft Uighur"/>
+        <a:font script="Geor" typeface="Sylfaen"/>
+        <a:font script="Armn" typeface="Arial"/>
+        <a:font script="Bugi" typeface="Leelawadee UI"/>
+        <a:font script="Bopo" typeface="Microsoft JhengHei"/>
+        <a:font script="Java" typeface="Javanese Text"/>
+        <a:font script="Lisu" typeface="Segoe UI"/>
+        <a:font script="Mymr" typeface="Myanmar Text"/>
+        <a:font script="Nkoo" typeface="Ebrima"/>
+        <a:font script="Olck" typeface="Nirmala UI"/>
+        <a:font script="Osma" typeface="Ebrima"/>
+        <a:font script="Phag" typeface="Phagspa"/>
+        <a:font script="Syrn" typeface="Estrangelo Edessa"/>
+        <a:font script="Syrj" typeface="Estrangelo Edessa"/>
+        <a:font script="Syre" typeface="Estrangelo Edessa"/>
+        <a:font script="Sora" typeface="Nirmala UI"/>
+        <a:font script="Tale" typeface="Microsoft Tai Le"/>
+        <a:font script="Talu" typeface="Microsoft New Tai Lue"/>
+        <a:font script="Tfng" typeface="Ebrima"/>
+      </a:majorFont>
+      <a:minorFont>
+        <a:latin typeface="맑은 고딕" panose="02110004020202020204"/>
+        <a:ea typeface=""/>
+        <a:cs typeface=""/>
+        <a:font script="Jpan" typeface="游ゴシック"/>
+        <a:font script="Hang" typeface="맑은 고딕"/>
+        <a:font script="Hans" typeface="等线"/>
+        <a:font script="Hant" typeface="新細明體"/>
+        <a:font script="Arab" typeface="Arial"/>
+        <a:font script="Hebr" typeface="Arial"/>
+        <a:font script="Thai" typeface="Cordia New"/>
+        <a:font script="Ethi" typeface="Nyala"/>
+        <a:font script="Beng" typeface="Vrinda"/>
+        <a:font script="Gujr" typeface="Shruti"/>
+        <a:font script="Khmr" typeface="DaunPenh"/>
+        <a:font script="Knda" typeface="Tunga"/>
+        <a:font script="Guru" typeface="Raavi"/>
+        <a:font script="Cans" typeface="Euphemia"/>
+        <a:font script="Cher" typeface="Plantagenet Cherokee"/>
+        <a:font script="Yiii" typeface="Microsoft Yi Baiti"/>
+        <a:font script="Tibt" typeface="Microsoft Himalaya"/>
+        <a:font script="Thaa" typeface="MV Boli"/>
+        <a:font script="Deva" typeface="Mangal"/>
+        <a:font script="Telu" typeface="Gautami"/>
+        <a:font script="Taml" typeface="Latha"/>
+        <a:font script="Syrc" typeface="Estrangelo Edessa"/>
+        <a:font script="Orya" typeface="Kalinga"/>
+        <a:font script="Mlym" typeface="Kartika"/>
+        <a:font script="Laoo" typeface="DokChampa"/>
+        <a:font script="Sinh" typeface="Iskoola Pota"/>
+        <a:font script="Mong" typeface="Mongolian Baiti"/>
+        <a:font script="Viet" typeface="Arial"/>
+        <a:font script="Uigh" typeface="Microsoft Uighur"/>
+        <a:font script="Geor" typeface="Sylfaen"/>
+        <a:font script="Armn" typeface="Arial"/>
+        <a:font script="Bugi" typeface="Leelawadee UI"/>
+        <a:font script="Bopo" typeface="Microsoft JhengHei"/>
+        <a:font script="Java" typeface="Javanese Text"/>
+        <a:font script="Lisu" typeface="Segoe UI"/>
+        <a:font script="Mymr" typeface="Myanmar Text"/>
+        <a:font script="Nkoo" typeface="Ebrima"/>
+        <a:font script="Olck" typeface="Nirmala UI"/>
+        <a:font script="Osma" typeface="Ebrima"/>
+        <a:font script="Phag" typeface="Phagspa"/>
+        <a:font script="Syrn" typeface="Estrangelo Edessa"/>
+        <a:font script="Syrj" typeface="Estrangelo Edessa"/>
+        <a:font script="Syre" typeface="Estrangelo Edessa"/>
+        <a:font script="Sora" typeface="Nirmala UI"/>
+        <a:font script="Tale" typeface="Microsoft Tai Le"/>
+        <a:font script="Talu" typeface="Microsoft New Tai Lue"/>
+        <a:font script="Tfng" typeface="Ebrima"/>
+      </a:minorFont>
+    </a:fontScheme>
+    <a:fmtScheme name="Office">
+      <a:fillStyleLst>
+        <a:solidFill>
+          <a:schemeClr val="phClr"/>
+        </a:solidFill>
+        <a:gradFill rotWithShape="1">
+          <a:gsLst>
+            <a:gs pos="0">
+              <a:schemeClr val="phClr">
+                <a:lumMod val="110000"/>
+                <a:satMod val="105000"/>
+                <a:tint val="67000"/>
+              </a:schemeClr>
+            </a:gs>
+            <a:gs pos="50000">
+              <a:schemeClr val="phClr">
+                <a:lumMod val="105000"/>
+                <a:satMod val="103000"/>
+                <a:tint val="73000"/>
+              </a:schemeClr>
+            </a:gs>
+            <a:gs pos="100000">
+              <a:schemeClr val="phClr">
+                <a:lumMod val="105000"/>
+                <a:satMod val="109000"/>
+                <a:tint val="81000"/>
+              </a:schemeClr>
+            </a:gs>
+          </a:gsLst>
+          <a:lin ang="5400000" scaled="0"/>
+        </a:gradFill>
+        <a:gradFill rotWithShape="1">
+          <a:gsLst>
+            <a:gs pos="0">
+              <a:schemeClr val="phClr">
+                <a:satMod val="103000"/>
+                <a:lumMod val="102000"/>
+                <a:tint val="94000"/>
+              </a:schemeClr>
+            </a:gs>
+            <a:gs pos="50000">
+              <a:schemeClr val="phClr">
+                <a:satMod val="110000"/>
+                <a:lumMod val="100000"/>
+                <a:shade val="100000"/>
+              </a:schemeClr>
+            </a:gs>
+            <a:gs pos="100000">
+              <a:schemeClr val="phClr">
+                <a:lumMod val="99000"/>
+                <a:satMod val="120000"/>
+                <a:shade val="78000"/>
+              </a:schemeClr>
+            </a:gs>
+          </a:gsLst>
+          <a:lin ang="5400000" scaled="0"/>
+        </a:gradFill>
+      </a:fillStyleLst>
+      <a:lnStyleLst>
+        <a:ln w="12700" cap="flat" cmpd="sng" algn="ctr">
+          <a:solidFill>
+            <a:schemeClr val="phClr"/>
+          </a:solidFill>
+          <a:prstDash val="solid"/>
+          <a:miter lim="800000"/>
+        </a:ln>
+        <a:ln w="19050" cap="flat" cmpd="sng" algn="ctr">
+          <a:solidFill>
+            <a:schemeClr val="phClr"/>
+          </a:solidFill>
+          <a:prstDash val="solid"/>
+          <a:miter lim="800000"/>
+        </a:ln>
+        <a:ln w="25400" cap="flat" cmpd="sng" algn="ctr">
+          <a:solidFill>
+            <a:schemeClr val="phClr"/>
+          </a:solidFill>
+          <a:prstDash val="solid"/>
+          <a:miter lim="800000"/>
+        </a:ln>
+      </a:lnStyleLst>
+      <a:effectStyleLst>
+        <a:effectStyle>
+          <a:effectLst/>
+        </a:effectStyle>
+        <a:effectStyle>
+          <a:effectLst/>
+        </a:effectStyle>
+        <a:effectStyle>
+          <a:effectLst>
+            <a:outerShdw blurRad="57150" dist="19050" dir="5400000" algn="ctr" rotWithShape="0">
+              <a:srgbClr val="000000">
+                <a:alpha val="63000"/>
+              </a:srgbClr>
+            </a:outerShdw>
+          </a:effectLst>
+        </a:effectStyle>
+      </a:effectStyleLst>
+      <a:bgFillStyleLst>
+        <a:solidFill>
+          <a:schemeClr val="phClr"/>
+        </a:solidFill>
+        <a:solidFill>
+          <a:schemeClr val="phClr">
+            <a:tint val="95000"/>
+            <a:satMod val="170000"/>
+          </a:schemeClr>
+        </a:solidFill>
+        <a:gradFill rotWithShape="1">
+          <a:gsLst>
+            <a:gs pos="0">
+              <a:schemeClr val="phClr">
+                <a:tint val="93000"/>
+                <a:satMod val="150000"/>
+                <a:shade val="98000"/>
+                <a:lumMod val="102000"/>
+              </a:schemeClr>
+            </a:gs>
+            <a:gs pos="50000">
+              <a:schemeClr val="phClr">
+                <a:tint val="98000"/>
+                <a:satMod val="130000"/>
+                <a:shade val="90000"/>
+                <a:lumMod val="103000"/>
+              </a:schemeClr>
+            </a:gs>
+            <a:gs pos="100000">
+              <a:schemeClr val="phClr">
+                <a:shade val="63000"/>
+                <a:satMod val="120000"/>
+              </a:schemeClr>
+            </a:gs>
+          </a:gsLst>
+          <a:lin ang="5400000" scaled="0"/>
+        </a:gradFill>
+      </a:bgFillStyleLst>
+    </a:fmtScheme>
+  </a:themeElements>
+  <a:objectDefaults>
+    <a:lnDef>
+      <a:spPr/>
+      <a:bodyPr/>
+      <a:lstStyle/>
+      <a:style>
+        <a:lnRef idx="2">
+          <a:schemeClr val="accent1"/>
+        </a:lnRef>
+        <a:fillRef idx="0">
+          <a:schemeClr val="accent1"/>
+        </a:fillRef>
+        <a:effectRef idx="1">
+          <a:schemeClr val="accent1"/>
+        </a:effectRef>
+        <a:fontRef idx="minor">
+          <a:schemeClr val="tx1"/>
+        </a:fontRef>
+      </a:style>
+    </a:lnDef>
+  </a:objectDefaults>
+  <a:extraClrSchemeLst/>
+  <a:extLst>
+    <a:ext uri="{05A4C25C-085E-4340-85A3-A5531E510DB2}">
+      <thm15:themeFamily xmlns:thm15="http://schemas.microsoft.com/office/thememl/2012/main" name="Office Theme" id="{2E142A2C-CD16-42D6-873A-C26D2A0506FA}" vid="{1BDDFF52-6CD6-40A5-AB3C-68EB2F1E4D0A}"/>
+    </a:ext>
+  </a:extLst>
+</a:theme>
 </file>